--- a/docs/presentation.pptx
+++ b/docs/presentation.pptx
@@ -1,6 +1,6 @@
 
 <file path=ppt/presentation.xml><?xml version="1.0" encoding="utf-8"?>
-<p:presentation xmlns:a="http://schemas.openxmlformats.org/drawingml/2006/main" xmlns:r="http://schemas.openxmlformats.org/officeDocument/2006/relationships" xmlns:p="http://schemas.openxmlformats.org/presentationml/2006/main" saveSubsetFonts="1" autoCompressPictures="0">
+<p:presentation xmlns:a="http://schemas.openxmlformats.org/drawingml/2006/main" xmlns:p="http://schemas.openxmlformats.org/presentationml/2006/main" xmlns:r="http://schemas.openxmlformats.org/officeDocument/2006/relationships" saveSubsetFonts="1" autoCompressPictures="0">
   <p:sldMasterIdLst>
     <p:sldMasterId id="2147483648" r:id="rId1"/>
   </p:sldMasterIdLst>
@@ -20,9 +20,11 @@
     <p:sldId id="268" r:id="rId19"/>
     <p:sldId id="269" r:id="rId20"/>
     <p:sldId id="270" r:id="rId21"/>
+    <p:sldId id="272" r:id="rId23"/>
+    <p:sldId id="273" r:id="rId24"/>
     <p:sldId id="271" r:id="rId22"/>
   </p:sldIdLst>
-  <p:sldSz cx="9144000" cy="6858000" type="screen4x3"/>
+  <p:sldSz cx="12192000" cy="6858000" type="screen16x9"/>
   <p:notesSz cx="6858000" cy="9144000"/>
   <p:defaultTextStyle>
     <a:defPPr>
@@ -151,8 +153,8 @@
         </p:nvSpPr>
         <p:spPr>
           <a:xfrm>
-            <a:off x="685800" y="2130425"/>
-            <a:ext cx="7772400" cy="1470025"/>
+            <a:off x="914400" y="2130425"/>
+            <a:ext cx="10363200" cy="1470025"/>
           </a:xfrm>
         </p:spPr>
         <p:txBody>
@@ -179,8 +181,8 @@
         </p:nvSpPr>
         <p:spPr>
           <a:xfrm>
-            <a:off x="1371600" y="3886200"/>
-            <a:ext cx="6400800" cy="1752600"/>
+            <a:off x="1828800" y="3886200"/>
+            <a:ext cx="8534400" cy="1752600"/>
           </a:xfrm>
         </p:spPr>
         <p:txBody>
@@ -563,8 +565,8 @@
         </p:nvSpPr>
         <p:spPr>
           <a:xfrm>
-            <a:off x="6629400" y="274638"/>
-            <a:ext cx="2057400" cy="5851525"/>
+            <a:off x="8839200" y="274638"/>
+            <a:ext cx="2743200" cy="5851525"/>
           </a:xfrm>
         </p:spPr>
         <p:txBody>
@@ -591,8 +593,8 @@
         </p:nvSpPr>
         <p:spPr>
           <a:xfrm>
-            <a:off x="457200" y="274638"/>
-            <a:ext cx="6019800" cy="5851525"/>
+            <a:off x="609600" y="274638"/>
+            <a:ext cx="8026400" cy="5851525"/>
           </a:xfrm>
         </p:spPr>
         <p:txBody>
@@ -913,8 +915,8 @@
         </p:nvSpPr>
         <p:spPr>
           <a:xfrm>
-            <a:off x="722313" y="4406900"/>
-            <a:ext cx="7772400" cy="1362075"/>
+            <a:off x="963084" y="4406900"/>
+            <a:ext cx="10363200" cy="1362075"/>
           </a:xfrm>
         </p:spPr>
         <p:txBody>
@@ -945,8 +947,8 @@
         </p:nvSpPr>
         <p:spPr>
           <a:xfrm>
-            <a:off x="722313" y="2906713"/>
-            <a:ext cx="7772400" cy="1500187"/>
+            <a:off x="963084" y="2906713"/>
+            <a:ext cx="10363200" cy="1500187"/>
           </a:xfrm>
         </p:spPr>
         <p:txBody>
@@ -1182,8 +1184,8 @@
         </p:nvSpPr>
         <p:spPr>
           <a:xfrm>
-            <a:off x="457200" y="1600200"/>
-            <a:ext cx="4038600" cy="4525963"/>
+            <a:off x="609600" y="1600200"/>
+            <a:ext cx="5384800" cy="4525963"/>
           </a:xfrm>
         </p:spPr>
         <p:txBody>
@@ -1267,8 +1269,8 @@
         </p:nvSpPr>
         <p:spPr>
           <a:xfrm>
-            <a:off x="4648200" y="1600200"/>
-            <a:ext cx="4038600" cy="4525963"/>
+            <a:off x="6197600" y="1600200"/>
+            <a:ext cx="5384800" cy="4525963"/>
           </a:xfrm>
         </p:spPr>
         <p:txBody>
@@ -1474,8 +1476,8 @@
         </p:nvSpPr>
         <p:spPr>
           <a:xfrm>
-            <a:off x="457200" y="1535113"/>
-            <a:ext cx="4040188" cy="639762"/>
+            <a:off x="609600" y="1535113"/>
+            <a:ext cx="5386917" cy="639762"/>
           </a:xfrm>
         </p:spPr>
         <p:txBody>
@@ -1539,8 +1541,8 @@
         </p:nvSpPr>
         <p:spPr>
           <a:xfrm>
-            <a:off x="457200" y="2174875"/>
-            <a:ext cx="4040188" cy="3951288"/>
+            <a:off x="609600" y="2174875"/>
+            <a:ext cx="5386917" cy="3951288"/>
           </a:xfrm>
         </p:spPr>
         <p:txBody>
@@ -1624,8 +1626,8 @@
         </p:nvSpPr>
         <p:spPr>
           <a:xfrm>
-            <a:off x="4645025" y="1535113"/>
-            <a:ext cx="4041775" cy="639762"/>
+            <a:off x="6193367" y="1535113"/>
+            <a:ext cx="5389033" cy="639762"/>
           </a:xfrm>
         </p:spPr>
         <p:txBody>
@@ -1689,8 +1691,8 @@
         </p:nvSpPr>
         <p:spPr>
           <a:xfrm>
-            <a:off x="4645025" y="2174875"/>
-            <a:ext cx="4041775" cy="3951288"/>
+            <a:off x="6193367" y="2174875"/>
+            <a:ext cx="5389033" cy="3951288"/>
           </a:xfrm>
         </p:spPr>
         <p:txBody>
@@ -2082,8 +2084,8 @@
         </p:nvSpPr>
         <p:spPr>
           <a:xfrm>
-            <a:off x="457200" y="273050"/>
-            <a:ext cx="3008313" cy="1162050"/>
+            <a:off x="609600" y="273050"/>
+            <a:ext cx="4011084" cy="1162050"/>
           </a:xfrm>
         </p:spPr>
         <p:txBody>
@@ -2114,8 +2116,8 @@
         </p:nvSpPr>
         <p:spPr>
           <a:xfrm>
-            <a:off x="3575050" y="273050"/>
-            <a:ext cx="5111750" cy="5853113"/>
+            <a:off x="4766733" y="273050"/>
+            <a:ext cx="6815667" cy="5853113"/>
           </a:xfrm>
         </p:spPr>
         <p:txBody>
@@ -2199,8 +2201,8 @@
         </p:nvSpPr>
         <p:spPr>
           <a:xfrm>
-            <a:off x="457200" y="1435100"/>
-            <a:ext cx="3008313" cy="4691063"/>
+            <a:off x="609600" y="1435100"/>
+            <a:ext cx="4011084" cy="4691063"/>
           </a:xfrm>
         </p:spPr>
         <p:txBody>
@@ -2359,8 +2361,8 @@
         </p:nvSpPr>
         <p:spPr>
           <a:xfrm>
-            <a:off x="1792288" y="4800600"/>
-            <a:ext cx="5486400" cy="566738"/>
+            <a:off x="2389717" y="4800600"/>
+            <a:ext cx="7315200" cy="566738"/>
           </a:xfrm>
         </p:spPr>
         <p:txBody>
@@ -2391,8 +2393,8 @@
         </p:nvSpPr>
         <p:spPr>
           <a:xfrm>
-            <a:off x="1792288" y="612775"/>
-            <a:ext cx="5486400" cy="4114800"/>
+            <a:off x="2389717" y="612775"/>
+            <a:ext cx="7315200" cy="4114800"/>
           </a:xfrm>
         </p:spPr>
         <p:txBody>
@@ -2452,8 +2454,8 @@
         </p:nvSpPr>
         <p:spPr>
           <a:xfrm>
-            <a:off x="1792288" y="5367338"/>
-            <a:ext cx="5486400" cy="804862"/>
+            <a:off x="2389717" y="5367338"/>
+            <a:ext cx="7315200" cy="804862"/>
           </a:xfrm>
         </p:spPr>
         <p:txBody>
@@ -2617,8 +2619,8 @@
         </p:nvSpPr>
         <p:spPr>
           <a:xfrm>
-            <a:off x="457200" y="274638"/>
-            <a:ext cx="8229600" cy="1143000"/>
+            <a:off x="609600" y="274638"/>
+            <a:ext cx="10972800" cy="1143000"/>
           </a:xfrm>
           <a:prstGeom prst="rect">
             <a:avLst/>
@@ -2650,8 +2652,8 @@
         </p:nvSpPr>
         <p:spPr>
           <a:xfrm>
-            <a:off x="457200" y="1600200"/>
-            <a:ext cx="8229600" cy="4525963"/>
+            <a:off x="609600" y="1600200"/>
+            <a:ext cx="10972800" cy="4525963"/>
           </a:xfrm>
           <a:prstGeom prst="rect">
             <a:avLst/>
@@ -2712,8 +2714,8 @@
         </p:nvSpPr>
         <p:spPr>
           <a:xfrm>
-            <a:off x="457200" y="6356350"/>
-            <a:ext cx="2133600" cy="365125"/>
+            <a:off x="609600" y="6356350"/>
+            <a:ext cx="2844800" cy="365125"/>
           </a:xfrm>
           <a:prstGeom prst="rect">
             <a:avLst/>
@@ -2753,8 +2755,8 @@
         </p:nvSpPr>
         <p:spPr>
           <a:xfrm>
-            <a:off x="3124200" y="6356350"/>
-            <a:ext cx="2895600" cy="365125"/>
+            <a:off x="4165600" y="6356350"/>
+            <a:ext cx="3860800" cy="365125"/>
           </a:xfrm>
           <a:prstGeom prst="rect">
             <a:avLst/>
@@ -2790,8 +2792,8 @@
         </p:nvSpPr>
         <p:spPr>
           <a:xfrm>
-            <a:off x="6553200" y="6356350"/>
-            <a:ext cx="2133600" cy="365125"/>
+            <a:off x="8737600" y="6356350"/>
+            <a:ext cx="2844800" cy="365125"/>
           </a:xfrm>
           <a:prstGeom prst="rect">
             <a:avLst/>
@@ -3127,7 +3129,7 @@
         </p:blipFill>
         <p:spPr>
           <a:xfrm>
-            <a:off x="36576" y="27432"/>
+            <a:off x="48768" y="27432"/>
             <a:ext cx="1709928" cy="941832"/>
           </a:xfrm>
           <a:prstGeom prst="rect">
@@ -3143,8 +3145,8 @@
         </p:nvSpPr>
         <p:spPr>
           <a:xfrm>
-            <a:off x="731520" y="1636776"/>
-            <a:ext cx="7680960" cy="731520"/>
+            <a:off x="975360" y="1636776"/>
+            <a:ext cx="10241280" cy="731520"/>
           </a:xfrm>
           <a:prstGeom prst="rect">
             <a:avLst/>
@@ -3185,8 +3187,8 @@
         </p:nvSpPr>
         <p:spPr>
           <a:xfrm>
-            <a:off x="731520" y="2395728"/>
-            <a:ext cx="7680960" cy="457200"/>
+            <a:off x="975360" y="2395728"/>
+            <a:ext cx="10241280" cy="457200"/>
           </a:xfrm>
           <a:prstGeom prst="rect">
             <a:avLst/>
@@ -3227,8 +3229,8 @@
         </p:nvSpPr>
         <p:spPr>
           <a:xfrm>
-            <a:off x="731520" y="3017520"/>
-            <a:ext cx="7680960" cy="27432"/>
+            <a:off x="975360" y="3017520"/>
+            <a:ext cx="10241280" cy="27432"/>
           </a:xfrm>
           <a:prstGeom prst="rect">
             <a:avLst/>
@@ -3271,8 +3273,8 @@
         </p:nvSpPr>
         <p:spPr>
           <a:xfrm>
-            <a:off x="731520" y="3200400"/>
-            <a:ext cx="7680960" cy="1188720"/>
+            <a:off x="975360" y="3200400"/>
+            <a:ext cx="10241280" cy="1188720"/>
           </a:xfrm>
           <a:prstGeom prst="rect">
             <a:avLst/>
@@ -3338,7 +3340,7 @@
                 </a:solidFill>
                 <a:latin typeface="Inter"/>
               </a:rPr>
-              <a:t>15 phút trình bày  ·  5 phút demo  ·  Q&amp;A</a:t>
+              <a:t>16 phút nội dung  ·  5 phút demo  ·  2 phút Q&amp;A</a:t>
             </a:r>
           </a:p>
         </p:txBody>
@@ -3351,8 +3353,8 @@
         </p:nvSpPr>
         <p:spPr>
           <a:xfrm>
-            <a:off x="731520" y="5577840"/>
-            <a:ext cx="7680960" cy="365760"/>
+            <a:off x="975360" y="5577840"/>
+            <a:ext cx="10241280" cy="365760"/>
           </a:xfrm>
           <a:prstGeom prst="rect">
             <a:avLst/>
@@ -3427,7 +3429,7 @@
         </p:blipFill>
         <p:spPr>
           <a:xfrm>
-            <a:off x="36576" y="27432"/>
+            <a:off x="48768" y="27432"/>
             <a:ext cx="1709928" cy="941832"/>
           </a:xfrm>
           <a:prstGeom prst="rect">
@@ -3443,8 +3445,8 @@
         </p:nvSpPr>
         <p:spPr>
           <a:xfrm>
-            <a:off x="1746504" y="512064"/>
-            <a:ext cx="6894576" cy="457200"/>
+            <a:off x="2328672" y="512064"/>
+            <a:ext cx="9192768" cy="457200"/>
           </a:xfrm>
           <a:prstGeom prst="rect">
             <a:avLst/>
@@ -3485,8 +3487,8 @@
         </p:nvSpPr>
         <p:spPr>
           <a:xfrm>
-            <a:off x="502920" y="1115568"/>
-            <a:ext cx="8138160" cy="27432"/>
+            <a:off x="670560" y="1115568"/>
+            <a:ext cx="10850880" cy="27432"/>
           </a:xfrm>
           <a:prstGeom prst="rect">
             <a:avLst/>
@@ -3529,8 +3531,8 @@
         </p:nvSpPr>
         <p:spPr>
           <a:xfrm>
-            <a:off x="502920" y="6355080"/>
-            <a:ext cx="1463040" cy="228600"/>
+            <a:off x="670560" y="6355080"/>
+            <a:ext cx="1950720" cy="228600"/>
           </a:xfrm>
           <a:prstGeom prst="rect">
             <a:avLst/>
@@ -3558,7 +3560,7 @@
                 </a:solidFill>
                 <a:latin typeface="Inter"/>
               </a:rPr>
-              <a:t>05/10/2026</a:t>
+              <a:t>2026</a:t>
             </a:r>
           </a:p>
         </p:txBody>
@@ -3571,8 +3573,8 @@
         </p:nvSpPr>
         <p:spPr>
           <a:xfrm>
-            <a:off x="3840480" y="6355080"/>
-            <a:ext cx="3291840" cy="228600"/>
+            <a:off x="5120640" y="6355080"/>
+            <a:ext cx="4389120" cy="228600"/>
           </a:xfrm>
           <a:prstGeom prst="rect">
             <a:avLst/>
@@ -3613,8 +3615,8 @@
         </p:nvSpPr>
         <p:spPr>
           <a:xfrm>
-            <a:off x="6858000" y="6355080"/>
-            <a:ext cx="1783080" cy="228600"/>
+            <a:off x="9144000" y="6355080"/>
+            <a:ext cx="2377440" cy="228600"/>
           </a:xfrm>
           <a:prstGeom prst="rect">
             <a:avLst/>
@@ -3655,8 +3657,8 @@
         </p:nvSpPr>
         <p:spPr>
           <a:xfrm>
-            <a:off x="502920" y="1371600"/>
-            <a:ext cx="4114800" cy="2697480"/>
+            <a:off x="670560" y="1371600"/>
+            <a:ext cx="5486400" cy="2697480"/>
           </a:xfrm>
           <a:prstGeom prst="rect">
             <a:avLst/>
@@ -3699,8 +3701,8 @@
         </p:nvSpPr>
         <p:spPr>
           <a:xfrm>
-            <a:off x="649224" y="1490472"/>
-            <a:ext cx="3822191" cy="2496312"/>
+            <a:off x="865632" y="1490472"/>
+            <a:ext cx="5096255" cy="2496312"/>
           </a:xfrm>
           <a:prstGeom prst="rect">
             <a:avLst/>
@@ -3874,8 +3876,8 @@
         </p:nvSpPr>
         <p:spPr>
           <a:xfrm>
-            <a:off x="4983480" y="1371600"/>
-            <a:ext cx="3657600" cy="3657600"/>
+            <a:off x="6644640" y="1371600"/>
+            <a:ext cx="4876800" cy="3657600"/>
           </a:xfrm>
           <a:prstGeom prst="rect">
             <a:avLst/>
@@ -4011,8 +4013,8 @@
         </p:nvSpPr>
         <p:spPr>
           <a:xfrm>
-            <a:off x="502920" y="4617720"/>
-            <a:ext cx="8138160" cy="640080"/>
+            <a:off x="670560" y="4617720"/>
+            <a:ext cx="10850880" cy="640080"/>
           </a:xfrm>
           <a:prstGeom prst="rect">
             <a:avLst/>
@@ -4055,8 +4057,8 @@
         </p:nvSpPr>
         <p:spPr>
           <a:xfrm>
-            <a:off x="667512" y="4736592"/>
-            <a:ext cx="7808976" cy="457199"/>
+            <a:off x="890016" y="4736592"/>
+            <a:ext cx="10411968" cy="457199"/>
           </a:xfrm>
           <a:prstGeom prst="rect">
             <a:avLst/>
@@ -4131,7 +4133,7 @@
         </p:blipFill>
         <p:spPr>
           <a:xfrm>
-            <a:off x="36576" y="27432"/>
+            <a:off x="48768" y="27432"/>
             <a:ext cx="1709928" cy="941832"/>
           </a:xfrm>
           <a:prstGeom prst="rect">
@@ -4147,8 +4149,8 @@
         </p:nvSpPr>
         <p:spPr>
           <a:xfrm>
-            <a:off x="1746504" y="512064"/>
-            <a:ext cx="6894576" cy="457200"/>
+            <a:off x="2328672" y="512064"/>
+            <a:ext cx="9192768" cy="457200"/>
           </a:xfrm>
           <a:prstGeom prst="rect">
             <a:avLst/>
@@ -4189,8 +4191,8 @@
         </p:nvSpPr>
         <p:spPr>
           <a:xfrm>
-            <a:off x="502920" y="1115568"/>
-            <a:ext cx="8138160" cy="27432"/>
+            <a:off x="670560" y="1115568"/>
+            <a:ext cx="10850880" cy="27432"/>
           </a:xfrm>
           <a:prstGeom prst="rect">
             <a:avLst/>
@@ -4233,8 +4235,8 @@
         </p:nvSpPr>
         <p:spPr>
           <a:xfrm>
-            <a:off x="502920" y="6355080"/>
-            <a:ext cx="1463040" cy="228600"/>
+            <a:off x="670560" y="6355080"/>
+            <a:ext cx="1950720" cy="228600"/>
           </a:xfrm>
           <a:prstGeom prst="rect">
             <a:avLst/>
@@ -4262,7 +4264,7 @@
                 </a:solidFill>
                 <a:latin typeface="Inter"/>
               </a:rPr>
-              <a:t>05/10/2026</a:t>
+              <a:t>2026</a:t>
             </a:r>
           </a:p>
         </p:txBody>
@@ -4275,8 +4277,8 @@
         </p:nvSpPr>
         <p:spPr>
           <a:xfrm>
-            <a:off x="3840480" y="6355080"/>
-            <a:ext cx="3291840" cy="228600"/>
+            <a:off x="5120640" y="6355080"/>
+            <a:ext cx="4389120" cy="228600"/>
           </a:xfrm>
           <a:prstGeom prst="rect">
             <a:avLst/>
@@ -4317,8 +4319,8 @@
         </p:nvSpPr>
         <p:spPr>
           <a:xfrm>
-            <a:off x="6858000" y="6355080"/>
-            <a:ext cx="1783080" cy="228600"/>
+            <a:off x="9144000" y="6355080"/>
+            <a:ext cx="2377440" cy="228600"/>
           </a:xfrm>
           <a:prstGeom prst="rect">
             <a:avLst/>
@@ -4360,8 +4362,8 @@
           <p:nvPr/>
         </p:nvGraphicFramePr>
         <p:xfrm>
-          <a:off x="502920" y="1371600"/>
-          <a:ext cx="8138160" cy="3401568"/>
+          <a:off x="670560" y="1371600"/>
+          <a:ext cx="10850880" cy="3401568"/>
         </p:xfrm>
         <a:graphic>
           <a:graphicData uri="http://schemas.openxmlformats.org/drawingml/2006/table">
@@ -4370,9 +4372,9 @@
                 <a:tableStyleId>{5C22544A-7EE6-4342-B048-85BDC9FD1C3A}</a:tableStyleId>
               </a:tblPr>
               <a:tblGrid>
-                <a:gridCol w="1554480"/>
-                <a:gridCol w="3017520"/>
-                <a:gridCol w="3566160"/>
+                <a:gridCol w="2072640"/>
+                <a:gridCol w="4023360"/>
+                <a:gridCol w="4754880"/>
               </a:tblGrid>
               <a:tr h="566928">
                 <a:tc>
@@ -4974,8 +4976,8 @@
         </p:nvSpPr>
         <p:spPr>
           <a:xfrm>
-            <a:off x="502920" y="4983480"/>
-            <a:ext cx="8138160" cy="548640"/>
+            <a:off x="670560" y="4983480"/>
+            <a:ext cx="10850880" cy="548640"/>
           </a:xfrm>
           <a:prstGeom prst="rect">
             <a:avLst/>
@@ -5018,8 +5020,8 @@
         </p:nvSpPr>
         <p:spPr>
           <a:xfrm>
-            <a:off x="667512" y="5102352"/>
-            <a:ext cx="7808976" cy="365759"/>
+            <a:off x="890016" y="5102352"/>
+            <a:ext cx="10411968" cy="365759"/>
           </a:xfrm>
           <a:prstGeom prst="rect">
             <a:avLst/>
@@ -5094,7 +5096,7 @@
         </p:blipFill>
         <p:spPr>
           <a:xfrm>
-            <a:off x="36576" y="27432"/>
+            <a:off x="48768" y="27432"/>
             <a:ext cx="1709928" cy="941832"/>
           </a:xfrm>
           <a:prstGeom prst="rect">
@@ -5110,8 +5112,8 @@
         </p:nvSpPr>
         <p:spPr>
           <a:xfrm>
-            <a:off x="1746504" y="512064"/>
-            <a:ext cx="6894576" cy="457200"/>
+            <a:off x="2328672" y="512064"/>
+            <a:ext cx="9192768" cy="457200"/>
           </a:xfrm>
           <a:prstGeom prst="rect">
             <a:avLst/>
@@ -5152,8 +5154,8 @@
         </p:nvSpPr>
         <p:spPr>
           <a:xfrm>
-            <a:off x="502920" y="1115568"/>
-            <a:ext cx="8138160" cy="27432"/>
+            <a:off x="670560" y="1115568"/>
+            <a:ext cx="10850880" cy="27432"/>
           </a:xfrm>
           <a:prstGeom prst="rect">
             <a:avLst/>
@@ -5196,8 +5198,8 @@
         </p:nvSpPr>
         <p:spPr>
           <a:xfrm>
-            <a:off x="502920" y="6355080"/>
-            <a:ext cx="1463040" cy="228600"/>
+            <a:off x="670560" y="6355080"/>
+            <a:ext cx="1950720" cy="228600"/>
           </a:xfrm>
           <a:prstGeom prst="rect">
             <a:avLst/>
@@ -5225,7 +5227,7 @@
                 </a:solidFill>
                 <a:latin typeface="Inter"/>
               </a:rPr>
-              <a:t>05/10/2026</a:t>
+              <a:t>2026</a:t>
             </a:r>
           </a:p>
         </p:txBody>
@@ -5238,8 +5240,8 @@
         </p:nvSpPr>
         <p:spPr>
           <a:xfrm>
-            <a:off x="3840480" y="6355080"/>
-            <a:ext cx="3291840" cy="228600"/>
+            <a:off x="5120640" y="6355080"/>
+            <a:ext cx="4389120" cy="228600"/>
           </a:xfrm>
           <a:prstGeom prst="rect">
             <a:avLst/>
@@ -5280,8 +5282,8 @@
         </p:nvSpPr>
         <p:spPr>
           <a:xfrm>
-            <a:off x="6858000" y="6355080"/>
-            <a:ext cx="1783080" cy="228600"/>
+            <a:off x="9144000" y="6355080"/>
+            <a:ext cx="2377440" cy="228600"/>
           </a:xfrm>
           <a:prstGeom prst="rect">
             <a:avLst/>
@@ -5323,8 +5325,8 @@
           <p:nvPr/>
         </p:nvGraphicFramePr>
         <p:xfrm>
-          <a:off x="502920" y="1371600"/>
-          <a:ext cx="8138160" cy="3621024"/>
+          <a:off x="670560" y="1371600"/>
+          <a:ext cx="10850880" cy="3621024"/>
         </p:xfrm>
         <a:graphic>
           <a:graphicData uri="http://schemas.openxmlformats.org/drawingml/2006/table">
@@ -5333,9 +5335,9 @@
                 <a:tableStyleId>{5C22544A-7EE6-4342-B048-85BDC9FD1C3A}</a:tableStyleId>
               </a:tblPr>
               <a:tblGrid>
-                <a:gridCol w="685800"/>
-                <a:gridCol w="3566160"/>
-                <a:gridCol w="3886200"/>
+                <a:gridCol w="914400"/>
+                <a:gridCol w="4754880"/>
+                <a:gridCol w="5181600"/>
               </a:tblGrid>
               <a:tr h="603504">
                 <a:tc>
@@ -5937,8 +5939,8 @@
         </p:nvSpPr>
         <p:spPr>
           <a:xfrm>
-            <a:off x="502920" y="5257800"/>
-            <a:ext cx="8138160" cy="548640"/>
+            <a:off x="670560" y="5257800"/>
+            <a:ext cx="10850880" cy="548640"/>
           </a:xfrm>
           <a:prstGeom prst="rect">
             <a:avLst/>
@@ -5981,8 +5983,8 @@
         </p:nvSpPr>
         <p:spPr>
           <a:xfrm>
-            <a:off x="667512" y="5376672"/>
-            <a:ext cx="7808976" cy="365759"/>
+            <a:off x="890016" y="5376672"/>
+            <a:ext cx="10411968" cy="365759"/>
           </a:xfrm>
           <a:prstGeom prst="rect">
             <a:avLst/>
@@ -6010,7 +6012,7 @@
                 </a:solidFill>
                 <a:latin typeface="Inter"/>
               </a:rPr>
-              <a:t>Dự phòng khi mạng lỗi: ảnh QR, token và ảnh chụp phản hồi 200/409 đã chuẩn bị sẵn.</a:t>
+              <a:t>ngrok config add-authtoken &lt;TOKEN&gt; · .\run.ps1 · quét Public URL · dự phòng: QR + ảnh 200/409.</a:t>
             </a:r>
           </a:p>
         </p:txBody>
@@ -6057,7 +6059,7 @@
         </p:blipFill>
         <p:spPr>
           <a:xfrm>
-            <a:off x="36576" y="27432"/>
+            <a:off x="48768" y="27432"/>
             <a:ext cx="1709928" cy="941832"/>
           </a:xfrm>
           <a:prstGeom prst="rect">
@@ -6073,8 +6075,8 @@
         </p:nvSpPr>
         <p:spPr>
           <a:xfrm>
-            <a:off x="1746504" y="512064"/>
-            <a:ext cx="6894576" cy="457200"/>
+            <a:off x="2328672" y="512064"/>
+            <a:ext cx="9192768" cy="457200"/>
           </a:xfrm>
           <a:prstGeom prst="rect">
             <a:avLst/>
@@ -6115,8 +6117,8 @@
         </p:nvSpPr>
         <p:spPr>
           <a:xfrm>
-            <a:off x="502920" y="1115568"/>
-            <a:ext cx="8138160" cy="27432"/>
+            <a:off x="670560" y="1115568"/>
+            <a:ext cx="10850880" cy="27432"/>
           </a:xfrm>
           <a:prstGeom prst="rect">
             <a:avLst/>
@@ -6159,8 +6161,8 @@
         </p:nvSpPr>
         <p:spPr>
           <a:xfrm>
-            <a:off x="502920" y="6355080"/>
-            <a:ext cx="1463040" cy="228600"/>
+            <a:off x="670560" y="6355080"/>
+            <a:ext cx="1950720" cy="228600"/>
           </a:xfrm>
           <a:prstGeom prst="rect">
             <a:avLst/>
@@ -6188,7 +6190,7 @@
                 </a:solidFill>
                 <a:latin typeface="Inter"/>
               </a:rPr>
-              <a:t>05/10/2026</a:t>
+              <a:t>2026</a:t>
             </a:r>
           </a:p>
         </p:txBody>
@@ -6201,8 +6203,8 @@
         </p:nvSpPr>
         <p:spPr>
           <a:xfrm>
-            <a:off x="3840480" y="6355080"/>
-            <a:ext cx="3291840" cy="228600"/>
+            <a:off x="5120640" y="6355080"/>
+            <a:ext cx="4389120" cy="228600"/>
           </a:xfrm>
           <a:prstGeom prst="rect">
             <a:avLst/>
@@ -6243,8 +6245,8 @@
         </p:nvSpPr>
         <p:spPr>
           <a:xfrm>
-            <a:off x="6858000" y="6355080"/>
-            <a:ext cx="1783080" cy="228600"/>
+            <a:off x="9144000" y="6355080"/>
+            <a:ext cx="2377440" cy="228600"/>
           </a:xfrm>
           <a:prstGeom prst="rect">
             <a:avLst/>
@@ -6285,8 +6287,8 @@
         </p:nvSpPr>
         <p:spPr>
           <a:xfrm>
-            <a:off x="502920" y="1371600"/>
-            <a:ext cx="3840480" cy="4023360"/>
+            <a:off x="670560" y="1371600"/>
+            <a:ext cx="5120640" cy="4023360"/>
           </a:xfrm>
           <a:prstGeom prst="rect">
             <a:avLst/>
@@ -6333,7 +6335,7 @@
                 </a:solidFill>
                 <a:latin typeface="Inter"/>
               </a:rPr>
-              <a:t>Ít nhất 128 bit, không chứa email/SĐT/thanh toán.</a:t>
+              <a:t>Demo sinh 192 bit ngẫu nhiên; không nhúng email/SĐT/thanh toán.</a:t>
             </a:r>
           </a:p>
           <a:p>
@@ -6422,8 +6424,8 @@
         </p:nvSpPr>
         <p:spPr>
           <a:xfrm>
-            <a:off x="4892040" y="1371600"/>
-            <a:ext cx="3749039" cy="4023360"/>
+            <a:off x="6522720" y="1371600"/>
+            <a:ext cx="4998719" cy="4023360"/>
           </a:xfrm>
           <a:prstGeom prst="rect">
             <a:avLst/>
@@ -6559,8 +6561,8 @@
         </p:nvSpPr>
         <p:spPr>
           <a:xfrm>
-            <a:off x="502920" y="5074920"/>
-            <a:ext cx="8138160" cy="594360"/>
+            <a:off x="670560" y="5074920"/>
+            <a:ext cx="10850880" cy="594360"/>
           </a:xfrm>
           <a:prstGeom prst="rect">
             <a:avLst/>
@@ -6603,8 +6605,8 @@
         </p:nvSpPr>
         <p:spPr>
           <a:xfrm>
-            <a:off x="667512" y="5193792"/>
-            <a:ext cx="7808976" cy="411480"/>
+            <a:off x="890016" y="5193792"/>
+            <a:ext cx="10411968" cy="411480"/>
           </a:xfrm>
           <a:prstGeom prst="rect">
             <a:avLst/>
@@ -6679,7 +6681,7 @@
         </p:blipFill>
         <p:spPr>
           <a:xfrm>
-            <a:off x="36576" y="27432"/>
+            <a:off x="48768" y="27432"/>
             <a:ext cx="1709928" cy="941832"/>
           </a:xfrm>
           <a:prstGeom prst="rect">
@@ -6695,8 +6697,8 @@
         </p:nvSpPr>
         <p:spPr>
           <a:xfrm>
-            <a:off x="1746504" y="512064"/>
-            <a:ext cx="6894576" cy="457200"/>
+            <a:off x="2328672" y="512064"/>
+            <a:ext cx="9192768" cy="457200"/>
           </a:xfrm>
           <a:prstGeom prst="rect">
             <a:avLst/>
@@ -6737,8 +6739,8 @@
         </p:nvSpPr>
         <p:spPr>
           <a:xfrm>
-            <a:off x="502920" y="1115568"/>
-            <a:ext cx="8138160" cy="27432"/>
+            <a:off x="670560" y="1115568"/>
+            <a:ext cx="10850880" cy="27432"/>
           </a:xfrm>
           <a:prstGeom prst="rect">
             <a:avLst/>
@@ -6781,8 +6783,8 @@
         </p:nvSpPr>
         <p:spPr>
           <a:xfrm>
-            <a:off x="502920" y="6355080"/>
-            <a:ext cx="1463040" cy="228600"/>
+            <a:off x="670560" y="6355080"/>
+            <a:ext cx="1950720" cy="228600"/>
           </a:xfrm>
           <a:prstGeom prst="rect">
             <a:avLst/>
@@ -6810,7 +6812,7 @@
                 </a:solidFill>
                 <a:latin typeface="Inter"/>
               </a:rPr>
-              <a:t>05/10/2026</a:t>
+              <a:t>2026</a:t>
             </a:r>
           </a:p>
         </p:txBody>
@@ -6823,8 +6825,8 @@
         </p:nvSpPr>
         <p:spPr>
           <a:xfrm>
-            <a:off x="3840480" y="6355080"/>
-            <a:ext cx="3291840" cy="228600"/>
+            <a:off x="5120640" y="6355080"/>
+            <a:ext cx="4389120" cy="228600"/>
           </a:xfrm>
           <a:prstGeom prst="rect">
             <a:avLst/>
@@ -6865,8 +6867,8 @@
         </p:nvSpPr>
         <p:spPr>
           <a:xfrm>
-            <a:off x="6858000" y="6355080"/>
-            <a:ext cx="1783080" cy="228600"/>
+            <a:off x="9144000" y="6355080"/>
+            <a:ext cx="2377440" cy="228600"/>
           </a:xfrm>
           <a:prstGeom prst="rect">
             <a:avLst/>
@@ -6908,8 +6910,8 @@
           <p:nvPr/>
         </p:nvGraphicFramePr>
         <p:xfrm>
-          <a:off x="502920" y="1371600"/>
-          <a:ext cx="8138160" cy="3950208"/>
+          <a:off x="670560" y="1371600"/>
+          <a:ext cx="10850880" cy="3950208"/>
         </p:xfrm>
         <a:graphic>
           <a:graphicData uri="http://schemas.openxmlformats.org/drawingml/2006/table">
@@ -6918,8 +6920,8 @@
                 <a:tableStyleId>{5C22544A-7EE6-4342-B048-85BDC9FD1C3A}</a:tableStyleId>
               </a:tblPr>
               <a:tblGrid>
-                <a:gridCol w="3291840"/>
-                <a:gridCol w="4846320"/>
+                <a:gridCol w="4389120"/>
+                <a:gridCol w="6461760"/>
               </a:tblGrid>
               <a:tr h="658368">
                 <a:tc>
@@ -7203,7 +7205,7 @@
                           </a:solidFill>
                           <a:latin typeface="Inter"/>
                         </a:rPr>
-                        <a:t>QR tĩnh bị chia sẻ</a:t>
+                        <a:t>Restart / nhiều worker</a:t>
                       </a:r>
                     </a:p>
                   </a:txBody>
@@ -7235,7 +7237,7 @@
                           </a:solidFill>
                           <a:latin typeface="Inter"/>
                         </a:rPr>
-                        <a:t>Vé động, đổi token theo chu kỳ, xác minh tài khoản</a:t>
+                        <a:t>Dict/lock mất khi restart, không đồng bộ giữa workers</a:t>
                       </a:r>
                     </a:p>
                   </a:txBody>
@@ -7269,7 +7271,7 @@
                           </a:solidFill>
                           <a:latin typeface="Inter"/>
                         </a:rPr>
-                        <a:t>Nội dung đích không an toàn</a:t>
+                        <a:t>Demo chưa lưu bền / chưa phân quyền</a:t>
                       </a:r>
                     </a:p>
                   </a:txBody>
@@ -7301,7 +7303,7 @@
                           </a:solidFill>
                           <a:latin typeface="Inter"/>
                         </a:rPr>
-                        <a:t>Whitelist domain, cảnh báo trước khi mở</a:t>
+                        <a:t>Production: DB transaction, row lock, auth và audit</a:t>
                       </a:r>
                     </a:p>
                   </a:txBody>
@@ -7363,7 +7365,7 @@
         </p:blipFill>
         <p:spPr>
           <a:xfrm>
-            <a:off x="36576" y="27432"/>
+            <a:off x="48768" y="27432"/>
             <a:ext cx="1709928" cy="941832"/>
           </a:xfrm>
           <a:prstGeom prst="rect">
@@ -7379,8 +7381,8 @@
         </p:nvSpPr>
         <p:spPr>
           <a:xfrm>
-            <a:off x="1746504" y="512064"/>
-            <a:ext cx="6894576" cy="457200"/>
+            <a:off x="2328672" y="512064"/>
+            <a:ext cx="9192768" cy="457200"/>
           </a:xfrm>
           <a:prstGeom prst="rect">
             <a:avLst/>
@@ -7421,8 +7423,8 @@
         </p:nvSpPr>
         <p:spPr>
           <a:xfrm>
-            <a:off x="502920" y="1115568"/>
-            <a:ext cx="8138160" cy="27432"/>
+            <a:off x="670560" y="1115568"/>
+            <a:ext cx="10850880" cy="27432"/>
           </a:xfrm>
           <a:prstGeom prst="rect">
             <a:avLst/>
@@ -7465,8 +7467,8 @@
         </p:nvSpPr>
         <p:spPr>
           <a:xfrm>
-            <a:off x="502920" y="6355080"/>
-            <a:ext cx="1463040" cy="228600"/>
+            <a:off x="670560" y="6355080"/>
+            <a:ext cx="1950720" cy="228600"/>
           </a:xfrm>
           <a:prstGeom prst="rect">
             <a:avLst/>
@@ -7494,7 +7496,7 @@
                 </a:solidFill>
                 <a:latin typeface="Inter"/>
               </a:rPr>
-              <a:t>05/10/2026</a:t>
+              <a:t>2026</a:t>
             </a:r>
           </a:p>
         </p:txBody>
@@ -7507,8 +7509,8 @@
         </p:nvSpPr>
         <p:spPr>
           <a:xfrm>
-            <a:off x="3840480" y="6355080"/>
-            <a:ext cx="3291840" cy="228600"/>
+            <a:off x="5120640" y="6355080"/>
+            <a:ext cx="4389120" cy="228600"/>
           </a:xfrm>
           <a:prstGeom prst="rect">
             <a:avLst/>
@@ -7549,8 +7551,8 @@
         </p:nvSpPr>
         <p:spPr>
           <a:xfrm>
-            <a:off x="6858000" y="6355080"/>
-            <a:ext cx="1783080" cy="228600"/>
+            <a:off x="9144000" y="6355080"/>
+            <a:ext cx="2377440" cy="228600"/>
           </a:xfrm>
           <a:prstGeom prst="rect">
             <a:avLst/>
@@ -7592,8 +7594,8 @@
           <p:nvPr/>
         </p:nvGraphicFramePr>
         <p:xfrm>
-          <a:off x="502920" y="1325880"/>
-          <a:ext cx="8138160" cy="4114800"/>
+          <a:off x="670560" y="1325880"/>
+          <a:ext cx="10850880" cy="4114800"/>
         </p:xfrm>
         <a:graphic>
           <a:graphicData uri="http://schemas.openxmlformats.org/drawingml/2006/table">
@@ -7602,9 +7604,9 @@
                 <a:tableStyleId>{5C22544A-7EE6-4342-B048-85BDC9FD1C3A}</a:tableStyleId>
               </a:tblPr>
               <a:tblGrid>
-                <a:gridCol w="4114800"/>
-                <a:gridCol w="914400"/>
-                <a:gridCol w="3108960"/>
+                <a:gridCol w="5486400"/>
+                <a:gridCol w="1219200"/>
+                <a:gridCol w="4145280"/>
               </a:tblGrid>
               <a:tr h="457200">
                 <a:tc>
@@ -7982,7 +7984,7 @@
                           </a:solidFill>
                           <a:latin typeface="Inter"/>
                         </a:rPr>
-                        <a:t>Slide 7–11, demo/app.py</a:t>
+                        <a:t>Slides 7–11, 16; demo/app.py</a:t>
                       </a:r>
                     </a:p>
                   </a:txBody>
@@ -8178,7 +8180,7 @@
                           </a:solidFill>
                           <a:latin typeface="Inter"/>
                         </a:rPr>
-                        <a:t>README, requirements, tests, /docs</a:t>
+                        <a:t>README, slides 17, source, tests, /docs</a:t>
                       </a:r>
                     </a:p>
                   </a:txBody>
@@ -8276,7 +8278,7 @@
                           </a:solidFill>
                           <a:latin typeface="Inter"/>
                         </a:rPr>
-                        <a:t>Phân công, tập dượt, slide 16</a:t>
+                        <a:t>Slides 2, 18; presenter Q&amp;A</a:t>
                       </a:r>
                     </a:p>
                   </a:txBody>
@@ -8534,7 +8536,7 @@
         </p:blipFill>
         <p:spPr>
           <a:xfrm>
-            <a:off x="36576" y="27432"/>
+            <a:off x="48768" y="27432"/>
             <a:ext cx="1709928" cy="941832"/>
           </a:xfrm>
           <a:prstGeom prst="rect">
@@ -8550,8 +8552,8 @@
         </p:nvSpPr>
         <p:spPr>
           <a:xfrm>
-            <a:off x="1746504" y="512064"/>
-            <a:ext cx="6894576" cy="457200"/>
+            <a:off x="2328672" y="512064"/>
+            <a:ext cx="9192768" cy="457200"/>
           </a:xfrm>
           <a:prstGeom prst="rect">
             <a:avLst/>
@@ -8592,8 +8594,8 @@
         </p:nvSpPr>
         <p:spPr>
           <a:xfrm>
-            <a:off x="502920" y="1115568"/>
-            <a:ext cx="8138160" cy="27432"/>
+            <a:off x="670560" y="1115568"/>
+            <a:ext cx="10850880" cy="27432"/>
           </a:xfrm>
           <a:prstGeom prst="rect">
             <a:avLst/>
@@ -8636,8 +8638,8 @@
         </p:nvSpPr>
         <p:spPr>
           <a:xfrm>
-            <a:off x="502920" y="6355080"/>
-            <a:ext cx="1463040" cy="228600"/>
+            <a:off x="670560" y="6355080"/>
+            <a:ext cx="1950720" cy="228600"/>
           </a:xfrm>
           <a:prstGeom prst="rect">
             <a:avLst/>
@@ -8665,7 +8667,7 @@
                 </a:solidFill>
                 <a:latin typeface="Inter"/>
               </a:rPr>
-              <a:t>05/10/2026</a:t>
+              <a:t>2026</a:t>
             </a:r>
           </a:p>
         </p:txBody>
@@ -8678,8 +8680,8 @@
         </p:nvSpPr>
         <p:spPr>
           <a:xfrm>
-            <a:off x="3840480" y="6355080"/>
-            <a:ext cx="3291840" cy="228600"/>
+            <a:off x="5120640" y="6355080"/>
+            <a:ext cx="4389120" cy="228600"/>
           </a:xfrm>
           <a:prstGeom prst="rect">
             <a:avLst/>
@@ -8720,8 +8722,8 @@
         </p:nvSpPr>
         <p:spPr>
           <a:xfrm>
-            <a:off x="6858000" y="6355080"/>
-            <a:ext cx="1783080" cy="228600"/>
+            <a:off x="9144000" y="6355080"/>
+            <a:ext cx="2377440" cy="228600"/>
           </a:xfrm>
           <a:prstGeom prst="rect">
             <a:avLst/>
@@ -8749,7 +8751,7 @@
                 </a:solidFill>
                 <a:latin typeface="Inter"/>
               </a:rPr>
-              <a:t>16</a:t>
+              <a:t>18</a:t>
             </a:r>
           </a:p>
         </p:txBody>
@@ -8762,8 +8764,8 @@
         </p:nvSpPr>
         <p:spPr>
           <a:xfrm>
-            <a:off x="502920" y="1325880"/>
-            <a:ext cx="8138160" cy="1371600"/>
+            <a:off x="670560" y="1325880"/>
+            <a:ext cx="10850880" cy="1371600"/>
           </a:xfrm>
           <a:prstGeom prst="rect">
             <a:avLst/>
@@ -8824,8 +8826,8 @@
           <p:nvPr/>
         </p:nvGraphicFramePr>
         <p:xfrm>
-          <a:off x="502920" y="2880360"/>
-          <a:ext cx="8138160" cy="2267712"/>
+          <a:off x="670560" y="2880360"/>
+          <a:ext cx="10850880" cy="2267712"/>
         </p:xfrm>
         <a:graphic>
           <a:graphicData uri="http://schemas.openxmlformats.org/drawingml/2006/table">
@@ -8834,8 +8836,8 @@
                 <a:tableStyleId>{5C22544A-7EE6-4342-B048-85BDC9FD1C3A}</a:tableStyleId>
               </a:tblPr>
               <a:tblGrid>
-                <a:gridCol w="2743200"/>
-                <a:gridCol w="5394960"/>
+                <a:gridCol w="3657600"/>
+                <a:gridCol w="7193280"/>
               </a:tblGrid>
               <a:tr h="566928">
                 <a:tc>
@@ -9113,8 +9115,8 @@
         </p:nvSpPr>
         <p:spPr>
           <a:xfrm>
-            <a:off x="502920" y="5440680"/>
-            <a:ext cx="8138160" cy="685800"/>
+            <a:off x="670560" y="5440680"/>
+            <a:ext cx="10850880" cy="685800"/>
           </a:xfrm>
           <a:prstGeom prst="rect">
             <a:avLst/>
@@ -9157,8 +9159,8 @@
         </p:nvSpPr>
         <p:spPr>
           <a:xfrm>
-            <a:off x="649224" y="5559552"/>
-            <a:ext cx="7845552" cy="484632"/>
+            <a:off x="865632" y="5559552"/>
+            <a:ext cx="10460736" cy="484632"/>
           </a:xfrm>
           <a:prstGeom prst="rect">
             <a:avLst/>
@@ -9186,7 +9188,1674 @@
                 </a:solidFill>
                 <a:latin typeface="JetBrains Mono"/>
               </a:rPr>
-              <a:t>cd demo &amp;&amp; python app.py        # http://localhost:8000  ·  /docs  ·  ngrok tự bật</a:t>
+              <a:t>PowerShell: .\run.ps1  ·  http://localhost:8000  ·  /docs  ·  ngrok tự bật</a:t>
+            </a:r>
+          </a:p>
+        </p:txBody>
+      </p:sp>
+    </p:spTree>
+  </p:cSld>
+  <p:clrMapOvr>
+    <a:masterClrMapping/>
+  </p:clrMapOvr>
+</p:sld>
+</file>
+
+<file path=ppt/slides/slide17.xml><?xml version="1.0" encoding="utf-8"?>
+<p:sld xmlns:a="http://schemas.openxmlformats.org/drawingml/2006/main" xmlns:p="http://schemas.openxmlformats.org/presentationml/2006/main" xmlns:r="http://schemas.openxmlformats.org/officeDocument/2006/relationships">
+  <p:cSld>
+    <p:bg>
+      <p:bgPr>
+        <a:solidFill>
+          <a:srgbClr val="FFFFFF"/>
+        </a:solidFill>
+        <a:effectLst/>
+      </p:bgPr>
+    </p:bg>
+    <p:spTree>
+      <p:nvGrpSpPr>
+        <p:cNvPr id="1" name=""/>
+        <p:cNvGrpSpPr/>
+        <p:nvPr/>
+      </p:nvGrpSpPr>
+      <p:grpSpPr/>
+      <p:pic>
+        <p:nvPicPr>
+          <p:cNvPr id="2" name="Picture 1" descr="logo.png"/>
+          <p:cNvPicPr>
+            <a:picLocks noChangeAspect="1"/>
+          </p:cNvPicPr>
+          <p:nvPr/>
+        </p:nvPicPr>
+        <p:blipFill>
+          <a:blip r:embed="rId2"/>
+          <a:stretch>
+            <a:fillRect/>
+          </a:stretch>
+        </p:blipFill>
+        <p:spPr>
+          <a:xfrm>
+            <a:off x="48768" y="27432"/>
+            <a:ext cx="1709928" cy="941832"/>
+          </a:xfrm>
+          <a:prstGeom prst="rect">
+            <a:avLst/>
+          </a:prstGeom>
+        </p:spPr>
+      </p:pic>
+      <p:sp>
+        <p:nvSpPr>
+          <p:cNvPr id="3" name="TextBox 2"/>
+          <p:cNvSpPr txBox="1"/>
+          <p:nvPr/>
+        </p:nvSpPr>
+        <p:spPr>
+          <a:xfrm>
+            <a:off x="2328672" y="512064"/>
+            <a:ext cx="9192768" cy="457200"/>
+          </a:xfrm>
+          <a:prstGeom prst="rect">
+            <a:avLst/>
+          </a:prstGeom>
+          <a:noFill/>
+        </p:spPr>
+        <p:txBody>
+          <a:bodyPr wrap="square" anchor="t" lIns="0" rIns="0" tIns="0" bIns="0">
+            <a:spAutoFit/>
+          </a:bodyPr>
+          <a:lstStyle/>
+          <a:p>
+            <a:pPr algn="ctr">
+              <a:lnSpc>
+                <a:spcPct val="100000"/>
+              </a:lnSpc>
+              <a:spcAft>
+                <a:spcPts val="600"/>
+              </a:spcAft>
+            </a:pPr>
+            <a:r>
+              <a:rPr sz="2400" b="1">
+                <a:solidFill>
+                  <a:srgbClr val="1A1A1A"/>
+                </a:solidFill>
+                <a:latin typeface="Inter"/>
+              </a:rPr>
+              <a:t>CODE TOUR — luồng phát hành QR</a:t>
+            </a:r>
+          </a:p>
+        </p:txBody>
+      </p:sp>
+      <p:sp>
+        <p:nvSpPr>
+          <p:cNvPr id="4" name="Rectangle 3"/>
+          <p:cNvSpPr/>
+          <p:nvPr/>
+        </p:nvSpPr>
+        <p:spPr>
+          <a:xfrm>
+            <a:off x="670560" y="1115568"/>
+            <a:ext cx="10850880" cy="27432"/>
+          </a:xfrm>
+          <a:prstGeom prst="rect">
+            <a:avLst/>
+          </a:prstGeom>
+          <a:solidFill>
+            <a:srgbClr val="1A1A1A"/>
+          </a:solidFill>
+          <a:ln>
+            <a:noFill/>
+          </a:ln>
+          <a:effectLst/>
+        </p:spPr>
+        <p:style>
+          <a:lnRef idx="1">
+            <a:schemeClr val="accent1"/>
+          </a:lnRef>
+          <a:fillRef idx="3">
+            <a:schemeClr val="accent1"/>
+          </a:fillRef>
+          <a:effectRef idx="2">
+            <a:schemeClr val="accent1"/>
+          </a:effectRef>
+          <a:fontRef idx="minor">
+            <a:schemeClr val="lt1"/>
+          </a:fontRef>
+        </p:style>
+        <p:txBody>
+          <a:bodyPr rtlCol="0" anchor="ctr"/>
+          <a:lstStyle/>
+          <a:p>
+            <a:pPr algn="ctr"/>
+          </a:p>
+        </p:txBody>
+      </p:sp>
+      <p:sp>
+        <p:nvSpPr>
+          <p:cNvPr id="5" name="TextBox 4"/>
+          <p:cNvSpPr txBox="1"/>
+          <p:nvPr/>
+        </p:nvSpPr>
+        <p:spPr>
+          <a:xfrm>
+            <a:off x="670560" y="6355080"/>
+            <a:ext cx="1950720" cy="228600"/>
+          </a:xfrm>
+          <a:prstGeom prst="rect">
+            <a:avLst/>
+          </a:prstGeom>
+          <a:noFill/>
+        </p:spPr>
+        <p:txBody>
+          <a:bodyPr wrap="square" anchor="t" lIns="0" rIns="0" tIns="0" bIns="0">
+            <a:spAutoFit/>
+          </a:bodyPr>
+          <a:lstStyle/>
+          <a:p>
+            <a:pPr algn="l">
+              <a:lnSpc>
+                <a:spcPct val="100000"/>
+              </a:lnSpc>
+              <a:spcAft>
+                <a:spcPts val="600"/>
+              </a:spcAft>
+            </a:pPr>
+            <a:r>
+              <a:rPr sz="900" b="0">
+                <a:solidFill>
+                  <a:srgbClr val="666666"/>
+                </a:solidFill>
+                <a:latin typeface="Inter"/>
+              </a:rPr>
+              <a:t>2026</a:t>
+            </a:r>
+          </a:p>
+        </p:txBody>
+      </p:sp>
+      <p:sp>
+        <p:nvSpPr>
+          <p:cNvPr id="6" name="TextBox 5"/>
+          <p:cNvSpPr txBox="1"/>
+          <p:nvPr/>
+        </p:nvSpPr>
+        <p:spPr>
+          <a:xfrm>
+            <a:off x="5120640" y="6355080"/>
+            <a:ext cx="4389120" cy="228600"/>
+          </a:xfrm>
+          <a:prstGeom prst="rect">
+            <a:avLst/>
+          </a:prstGeom>
+          <a:noFill/>
+        </p:spPr>
+        <p:txBody>
+          <a:bodyPr wrap="square" anchor="t" lIns="0" rIns="0" tIns="0" bIns="0">
+            <a:spAutoFit/>
+          </a:bodyPr>
+          <a:lstStyle/>
+          <a:p>
+            <a:pPr algn="ctr">
+              <a:lnSpc>
+                <a:spcPct val="100000"/>
+              </a:lnSpc>
+              <a:spcAft>
+                <a:spcPts val="600"/>
+              </a:spcAft>
+            </a:pPr>
+            <a:r>
+              <a:rPr sz="900" b="0">
+                <a:solidFill>
+                  <a:srgbClr val="666666"/>
+                </a:solidFill>
+                <a:latin typeface="Inter"/>
+              </a:rPr>
+              <a:t>QR Code Generation &amp; Scanning  ·  Seminar 1</a:t>
+            </a:r>
+          </a:p>
+        </p:txBody>
+      </p:sp>
+      <p:sp>
+        <p:nvSpPr>
+          <p:cNvPr id="7" name="TextBox 6"/>
+          <p:cNvSpPr txBox="1"/>
+          <p:nvPr/>
+        </p:nvSpPr>
+        <p:spPr>
+          <a:xfrm>
+            <a:off x="9144000" y="6355080"/>
+            <a:ext cx="2377440" cy="228600"/>
+          </a:xfrm>
+          <a:prstGeom prst="rect">
+            <a:avLst/>
+          </a:prstGeom>
+          <a:noFill/>
+        </p:spPr>
+        <p:txBody>
+          <a:bodyPr wrap="square" anchor="t" lIns="0" rIns="0" tIns="0" bIns="0">
+            <a:spAutoFit/>
+          </a:bodyPr>
+          <a:lstStyle/>
+          <a:p>
+            <a:pPr algn="r">
+              <a:lnSpc>
+                <a:spcPct val="100000"/>
+              </a:lnSpc>
+              <a:spcAft>
+                <a:spcPts val="600"/>
+              </a:spcAft>
+            </a:pPr>
+            <a:r>
+              <a:rPr sz="900" b="0">
+                <a:solidFill>
+                  <a:srgbClr val="666666"/>
+                </a:solidFill>
+                <a:latin typeface="Inter"/>
+              </a:rPr>
+              <a:t>16</a:t>
+            </a:r>
+          </a:p>
+        </p:txBody>
+      </p:sp>
+      <p:sp>
+        <p:nvSpPr>
+          <p:cNvPr id="8" name="Rectangle 7"/>
+          <p:cNvSpPr/>
+          <p:nvPr/>
+        </p:nvSpPr>
+        <p:spPr>
+          <a:xfrm>
+            <a:off x="670560" y="1371600"/>
+            <a:ext cx="5486400" cy="2697480"/>
+          </a:xfrm>
+          <a:prstGeom prst="rect">
+            <a:avLst/>
+          </a:prstGeom>
+          <a:solidFill>
+            <a:srgbClr val="EEEEEE"/>
+          </a:solidFill>
+          <a:ln>
+            <a:noFill/>
+          </a:ln>
+          <a:effectLst/>
+        </p:spPr>
+        <p:style>
+          <a:lnRef idx="1">
+            <a:schemeClr val="accent1"/>
+          </a:lnRef>
+          <a:fillRef idx="3">
+            <a:schemeClr val="accent1"/>
+          </a:fillRef>
+          <a:effectRef idx="2">
+            <a:schemeClr val="accent1"/>
+          </a:effectRef>
+          <a:fontRef idx="minor">
+            <a:schemeClr val="lt1"/>
+          </a:fontRef>
+        </p:style>
+        <p:txBody>
+          <a:bodyPr rtlCol="0" anchor="ctr"/>
+          <a:lstStyle/>
+          <a:p>
+            <a:pPr algn="ctr"/>
+          </a:p>
+        </p:txBody>
+      </p:sp>
+      <p:sp>
+        <p:nvSpPr>
+          <p:cNvPr id="9" name="TextBox 8"/>
+          <p:cNvSpPr txBox="1"/>
+          <p:nvPr/>
+        </p:nvSpPr>
+        <p:spPr>
+          <a:xfrm>
+            <a:off x="865632" y="1490472"/>
+            <a:ext cx="5096255" cy="2496312"/>
+          </a:xfrm>
+          <a:prstGeom prst="rect">
+            <a:avLst/>
+          </a:prstGeom>
+          <a:noFill/>
+        </p:spPr>
+        <p:txBody>
+          <a:bodyPr wrap="square" anchor="t" lIns="0" rIns="0" tIns="0" bIns="0">
+            <a:spAutoFit/>
+          </a:bodyPr>
+          <a:lstStyle/>
+          <a:p>
+            <a:pPr algn="l">
+              <a:lnSpc>
+                <a:spcPct val="100000"/>
+              </a:lnSpc>
+              <a:spcAft>
+                <a:spcPts val="300"/>
+              </a:spcAft>
+            </a:pPr>
+            <a:r>
+              <a:rPr sz="1050" b="0">
+                <a:solidFill>
+                  <a:srgbClr val="333333"/>
+                </a:solidFill>
+                <a:latin typeface="JetBrains Mono"/>
+              </a:rPr>
+              <a:t>qr_type = QrType(body.get("type"))</a:t>
+            </a:r>
+          </a:p>
+          <a:p>
+            <a:pPr algn="l">
+              <a:lnSpc>
+                <a:spcPct val="100000"/>
+              </a:lnSpc>
+              <a:spcAft>
+                <a:spcPts val="300"/>
+              </a:spcAft>
+            </a:pPr>
+            <a:r>
+              <a:rPr sz="1050" b="0">
+                <a:solidFill>
+                  <a:srgbClr val="333333"/>
+                </a:solidFill>
+                <a:latin typeface="JetBrains Mono"/>
+              </a:rPr>
+              <a:t>token = secrets.token_urlsafe(24)</a:t>
+            </a:r>
+          </a:p>
+          <a:p>
+            <a:pPr algn="l">
+              <a:lnSpc>
+                <a:spcPct val="100000"/>
+              </a:lnSpc>
+              <a:spcAft>
+                <a:spcPts val="300"/>
+              </a:spcAft>
+            </a:pPr>
+            <a:r>
+              <a:rPr sz="1050" b="0">
+                <a:solidFill>
+                  <a:srgbClr val="333333"/>
+                </a:solidFill>
+                <a:latin typeface="JetBrains Mono"/>
+              </a:rPr>
+              <a:t>expires_at = now_utc + timedelta(seconds=ttl)</a:t>
+            </a:r>
+          </a:p>
+          <a:p>
+            <a:pPr algn="l">
+              <a:lnSpc>
+                <a:spcPct val="100000"/>
+              </a:lnSpc>
+              <a:spcAft>
+                <a:spcPts val="300"/>
+              </a:spcAft>
+            </a:pPr>
+            <a:r>
+              <a:rPr sz="1050" b="0">
+                <a:solidFill>
+                  <a:srgbClr val="333333"/>
+                </a:solidFill>
+                <a:latin typeface="JetBrains Mono"/>
+              </a:rPr>
+              <a:t>png = encode_qr(resolve_url(token))</a:t>
+            </a:r>
+          </a:p>
+          <a:p>
+            <a:pPr algn="l">
+              <a:lnSpc>
+                <a:spcPct val="100000"/>
+              </a:lnSpc>
+              <a:spcAft>
+                <a:spcPts val="300"/>
+              </a:spcAft>
+            </a:pPr>
+            <a:r>
+              <a:rPr sz="1050" b="0">
+                <a:solidFill>
+                  <a:srgbClr val="333333"/>
+                </a:solidFill>
+                <a:latin typeface="JetBrains Mono"/>
+              </a:rPr>
+              <a:t>credential = Credential(..., expires_at, png)</a:t>
+            </a:r>
+          </a:p>
+          <a:p>
+            <a:pPr algn="l">
+              <a:lnSpc>
+                <a:spcPct val="100000"/>
+              </a:lnSpc>
+              <a:spcAft>
+                <a:spcPts val="300"/>
+              </a:spcAft>
+            </a:pPr>
+            <a:r>
+              <a:rPr sz="1050" b="0">
+                <a:solidFill>
+                  <a:srgbClr val="333333"/>
+                </a:solidFill>
+                <a:latin typeface="JetBrains Mono"/>
+              </a:rPr>
+              <a:t>app.state.credentials[token] = credential</a:t>
+            </a:r>
+          </a:p>
+          <a:p>
+            <a:pPr algn="l">
+              <a:lnSpc>
+                <a:spcPct val="100000"/>
+              </a:lnSpc>
+              <a:spcAft>
+                <a:spcPts val="300"/>
+              </a:spcAft>
+            </a:pPr>
+            <a:r>
+              <a:rPr sz="1050" b="0">
+                <a:solidFill>
+                  <a:srgbClr val="333333"/>
+                </a:solidFill>
+                <a:latin typeface="JetBrains Mono"/>
+              </a:rPr>
+              <a:t>with credential.lock: check used_at</a:t>
+            </a:r>
+          </a:p>
+          <a:p>
+            <a:pPr algn="l">
+              <a:lnSpc>
+                <a:spcPct val="100000"/>
+              </a:lnSpc>
+              <a:spcAft>
+                <a:spcPts val="300"/>
+              </a:spcAft>
+            </a:pPr>
+            <a:r>
+              <a:rPr sz="1050" b="0">
+                <a:solidFill>
+                  <a:srgbClr val="333333"/>
+                </a:solidFill>
+                <a:latin typeface="JetBrains Mono"/>
+              </a:rPr>
+              <a:t>if unused: set used_at; else return 409</a:t>
+            </a:r>
+          </a:p>
+        </p:txBody>
+      </p:sp>
+      <p:sp>
+        <p:nvSpPr>
+          <p:cNvPr id="10" name="TextBox 9"/>
+          <p:cNvSpPr txBox="1"/>
+          <p:nvPr/>
+        </p:nvSpPr>
+        <p:spPr>
+          <a:xfrm>
+            <a:off x="6644640" y="1371600"/>
+            <a:ext cx="4876800" cy="3657600"/>
+          </a:xfrm>
+          <a:prstGeom prst="rect">
+            <a:avLst/>
+          </a:prstGeom>
+          <a:noFill/>
+        </p:spPr>
+        <p:txBody>
+          <a:bodyPr wrap="square" anchor="t" lIns="0" rIns="0" tIns="0" bIns="0">
+            <a:spAutoFit/>
+          </a:bodyPr>
+          <a:lstStyle/>
+          <a:p>
+            <a:pPr algn="l">
+              <a:lnSpc>
+                <a:spcPct val="100000"/>
+              </a:lnSpc>
+              <a:spcAft>
+                <a:spcPts val="200"/>
+              </a:spcAft>
+            </a:pPr>
+            <a:r>
+              <a:rPr sz="1400" b="1">
+                <a:solidFill>
+                  <a:srgbClr val="1A1A1A"/>
+                </a:solidFill>
+                <a:latin typeface="Inter"/>
+              </a:rPr>
+              <a:t>Validate request</a:t>
+            </a:r>
+          </a:p>
+          <a:p>
+            <a:pPr algn="l">
+              <a:lnSpc>
+                <a:spcPct val="100000"/>
+              </a:lnSpc>
+              <a:spcAft>
+                <a:spcPts val="1000"/>
+              </a:spcAft>
+            </a:pPr>
+            <a:r>
+              <a:rPr sz="1400" b="0">
+                <a:solidFill>
+                  <a:srgbClr val="1A1A1A"/>
+                </a:solidFill>
+                <a:latin typeface="Inter"/>
+              </a:rPr>
+              <a:t>POST /api/qr checks type, referenceId and label; optional fields depend on QR type.</a:t>
+            </a:r>
+          </a:p>
+          <a:p>
+            <a:pPr algn="l">
+              <a:lnSpc>
+                <a:spcPct val="100000"/>
+              </a:lnSpc>
+              <a:spcAft>
+                <a:spcPts val="200"/>
+              </a:spcAft>
+            </a:pPr>
+            <a:r>
+              <a:rPr sz="1400" b="1">
+                <a:solidFill>
+                  <a:srgbClr val="1A1A1A"/>
+                </a:solidFill>
+                <a:latin typeface="Inter"/>
+              </a:rPr>
+              <a:t>Build QR payload</a:t>
+            </a:r>
+          </a:p>
+          <a:p>
+            <a:pPr algn="l">
+              <a:lnSpc>
+                <a:spcPct val="100000"/>
+              </a:lnSpc>
+              <a:spcAft>
+                <a:spcPts val="1000"/>
+              </a:spcAft>
+            </a:pPr>
+            <a:r>
+              <a:rPr sz="1400" b="0">
+                <a:solidFill>
+                  <a:srgbClr val="1A1A1A"/>
+                </a:solidFill>
+                <a:latin typeface="Inter"/>
+              </a:rPr>
+              <a:t>The URL /t/{token} is encoded as PNG; response includes token, image and expiresAt.</a:t>
+            </a:r>
+          </a:p>
+          <a:p>
+            <a:pPr algn="l">
+              <a:lnSpc>
+                <a:spcPct val="100000"/>
+              </a:lnSpc>
+              <a:spcAft>
+                <a:spcPts val="200"/>
+              </a:spcAft>
+            </a:pPr>
+            <a:r>
+              <a:rPr sz="1400" b="1">
+                <a:solidFill>
+                  <a:srgbClr val="1A1A1A"/>
+                </a:solidFill>
+                <a:latin typeface="Inter"/>
+              </a:rPr>
+              <a:t>Consume once</a:t>
+            </a:r>
+          </a:p>
+          <a:p>
+            <a:pPr algn="l">
+              <a:lnSpc>
+                <a:spcPct val="100000"/>
+              </a:lnSpc>
+              <a:spcAft>
+                <a:spcPts val="600"/>
+              </a:spcAft>
+            </a:pPr>
+            <a:r>
+              <a:rPr sz="1400" b="0">
+                <a:solidFill>
+                  <a:srgbClr val="1A1A1A"/>
+                </a:solidFill>
+                <a:latin typeface="Inter"/>
+              </a:rPr>
+              <a:t>valid_credential checks token/expiry; credential.lock guards the used_at transition.</a:t>
+            </a:r>
+          </a:p>
+        </p:txBody>
+      </p:sp>
+      <p:sp>
+        <p:nvSpPr>
+          <p:cNvPr id="11" name="Rectangle 10"/>
+          <p:cNvSpPr/>
+          <p:nvPr/>
+        </p:nvSpPr>
+        <p:spPr>
+          <a:xfrm>
+            <a:off x="670560" y="4617720"/>
+            <a:ext cx="10850880" cy="640080"/>
+          </a:xfrm>
+          <a:prstGeom prst="rect">
+            <a:avLst/>
+          </a:prstGeom>
+          <a:solidFill>
+            <a:srgbClr val="EEEEEE"/>
+          </a:solidFill>
+          <a:ln>
+            <a:noFill/>
+          </a:ln>
+          <a:effectLst/>
+        </p:spPr>
+        <p:style>
+          <a:lnRef idx="1">
+            <a:schemeClr val="accent1"/>
+          </a:lnRef>
+          <a:fillRef idx="3">
+            <a:schemeClr val="accent1"/>
+          </a:fillRef>
+          <a:effectRef idx="2">
+            <a:schemeClr val="accent1"/>
+          </a:effectRef>
+          <a:fontRef idx="minor">
+            <a:schemeClr val="lt1"/>
+          </a:fontRef>
+        </p:style>
+        <p:txBody>
+          <a:bodyPr rtlCol="0" anchor="ctr"/>
+          <a:lstStyle/>
+          <a:p>
+            <a:pPr algn="ctr"/>
+          </a:p>
+        </p:txBody>
+      </p:sp>
+      <p:sp>
+        <p:nvSpPr>
+          <p:cNvPr id="12" name="TextBox 11"/>
+          <p:cNvSpPr txBox="1"/>
+          <p:nvPr/>
+        </p:nvSpPr>
+        <p:spPr>
+          <a:xfrm>
+            <a:off x="890016" y="4736592"/>
+            <a:ext cx="10411968" cy="457199"/>
+          </a:xfrm>
+          <a:prstGeom prst="rect">
+            <a:avLst/>
+          </a:prstGeom>
+          <a:noFill/>
+        </p:spPr>
+        <p:txBody>
+          <a:bodyPr wrap="square" anchor="t" lIns="0" rIns="0" tIns="0" bIns="0">
+            <a:spAutoFit/>
+          </a:bodyPr>
+          <a:lstStyle/>
+          <a:p>
+            <a:pPr algn="l">
+              <a:lnSpc>
+                <a:spcPct val="100000"/>
+              </a:lnSpc>
+              <a:spcAft>
+                <a:spcPts val="600"/>
+              </a:spcAft>
+            </a:pPr>
+            <a:r>
+              <a:rPr sz="1400" b="1">
+                <a:solidFill>
+                  <a:srgbClr val="333333"/>
+                </a:solidFill>
+                <a:latin typeface="Inter"/>
+              </a:rPr>
+              <a:t>Compact pseudocode; exact handlers are in demo/app.py. Dict + lock are process-local; use a DB transaction across workers.</a:t>
+            </a:r>
+          </a:p>
+        </p:txBody>
+      </p:sp>
+    </p:spTree>
+  </p:cSld>
+  <p:clrMapOvr>
+    <a:masterClrMapping/>
+  </p:clrMapOvr>
+</p:sld>
+</file>
+
+<file path=ppt/slides/slide18.xml><?xml version="1.0" encoding="utf-8"?>
+<p:sld xmlns:a="http://schemas.openxmlformats.org/drawingml/2006/main" xmlns:p="http://schemas.openxmlformats.org/presentationml/2006/main" xmlns:r="http://schemas.openxmlformats.org/officeDocument/2006/relationships">
+  <p:cSld>
+    <p:bg>
+      <p:bgPr>
+        <a:solidFill>
+          <a:srgbClr val="FFFFFF"/>
+        </a:solidFill>
+        <a:effectLst/>
+      </p:bgPr>
+    </p:bg>
+    <p:spTree>
+      <p:nvGrpSpPr>
+        <p:cNvPr id="1" name=""/>
+        <p:cNvGrpSpPr/>
+        <p:nvPr/>
+      </p:nvGrpSpPr>
+      <p:grpSpPr/>
+      <p:pic>
+        <p:nvPicPr>
+          <p:cNvPr id="2" name="Picture 1" descr="logo.png"/>
+          <p:cNvPicPr>
+            <a:picLocks noChangeAspect="1"/>
+          </p:cNvPicPr>
+          <p:nvPr/>
+        </p:nvPicPr>
+        <p:blipFill>
+          <a:blip r:embed="rId2"/>
+          <a:stretch>
+            <a:fillRect/>
+          </a:stretch>
+        </p:blipFill>
+        <p:spPr>
+          <a:xfrm>
+            <a:off x="48768" y="27432"/>
+            <a:ext cx="1709928" cy="941832"/>
+          </a:xfrm>
+          <a:prstGeom prst="rect">
+            <a:avLst/>
+          </a:prstGeom>
+        </p:spPr>
+      </p:pic>
+      <p:sp>
+        <p:nvSpPr>
+          <p:cNvPr id="3" name="TextBox 2"/>
+          <p:cNvSpPr txBox="1"/>
+          <p:nvPr/>
+        </p:nvSpPr>
+        <p:spPr>
+          <a:xfrm>
+            <a:off x="2328672" y="512064"/>
+            <a:ext cx="9192768" cy="457200"/>
+          </a:xfrm>
+          <a:prstGeom prst="rect">
+            <a:avLst/>
+          </a:prstGeom>
+          <a:noFill/>
+        </p:spPr>
+        <p:txBody>
+          <a:bodyPr wrap="square" anchor="t" lIns="0" rIns="0" tIns="0" bIns="0">
+            <a:spAutoFit/>
+          </a:bodyPr>
+          <a:lstStyle/>
+          <a:p>
+            <a:pPr algn="ctr">
+              <a:lnSpc>
+                <a:spcPct val="100000"/>
+              </a:lnSpc>
+              <a:spcAft>
+                <a:spcPts val="600"/>
+              </a:spcAft>
+            </a:pPr>
+            <a:r>
+              <a:rPr sz="2400" b="1">
+                <a:solidFill>
+                  <a:srgbClr val="1A1A1A"/>
+                </a:solidFill>
+                <a:latin typeface="Inter"/>
+              </a:rPr>
+              <a:t>HƯỚNG DẪN — cài đặt và tự kiểm chứng</a:t>
+            </a:r>
+          </a:p>
+        </p:txBody>
+      </p:sp>
+      <p:sp>
+        <p:nvSpPr>
+          <p:cNvPr id="4" name="Rectangle 3"/>
+          <p:cNvSpPr/>
+          <p:nvPr/>
+        </p:nvSpPr>
+        <p:spPr>
+          <a:xfrm>
+            <a:off x="670560" y="1115568"/>
+            <a:ext cx="10850880" cy="27432"/>
+          </a:xfrm>
+          <a:prstGeom prst="rect">
+            <a:avLst/>
+          </a:prstGeom>
+          <a:solidFill>
+            <a:srgbClr val="1A1A1A"/>
+          </a:solidFill>
+          <a:ln>
+            <a:noFill/>
+          </a:ln>
+          <a:effectLst/>
+        </p:spPr>
+        <p:style>
+          <a:lnRef idx="1">
+            <a:schemeClr val="accent1"/>
+          </a:lnRef>
+          <a:fillRef idx="3">
+            <a:schemeClr val="accent1"/>
+          </a:fillRef>
+          <a:effectRef idx="2">
+            <a:schemeClr val="accent1"/>
+          </a:effectRef>
+          <a:fontRef idx="minor">
+            <a:schemeClr val="lt1"/>
+          </a:fontRef>
+        </p:style>
+        <p:txBody>
+          <a:bodyPr rtlCol="0" anchor="ctr"/>
+          <a:lstStyle/>
+          <a:p>
+            <a:pPr algn="ctr"/>
+          </a:p>
+        </p:txBody>
+      </p:sp>
+      <p:sp>
+        <p:nvSpPr>
+          <p:cNvPr id="5" name="TextBox 4"/>
+          <p:cNvSpPr txBox="1"/>
+          <p:nvPr/>
+        </p:nvSpPr>
+        <p:spPr>
+          <a:xfrm>
+            <a:off x="670560" y="6355080"/>
+            <a:ext cx="1950720" cy="228600"/>
+          </a:xfrm>
+          <a:prstGeom prst="rect">
+            <a:avLst/>
+          </a:prstGeom>
+          <a:noFill/>
+        </p:spPr>
+        <p:txBody>
+          <a:bodyPr wrap="square" anchor="t" lIns="0" rIns="0" tIns="0" bIns="0">
+            <a:spAutoFit/>
+          </a:bodyPr>
+          <a:lstStyle/>
+          <a:p>
+            <a:pPr algn="l">
+              <a:lnSpc>
+                <a:spcPct val="100000"/>
+              </a:lnSpc>
+              <a:spcAft>
+                <a:spcPts val="600"/>
+              </a:spcAft>
+            </a:pPr>
+            <a:r>
+              <a:rPr sz="900" b="0">
+                <a:solidFill>
+                  <a:srgbClr val="666666"/>
+                </a:solidFill>
+                <a:latin typeface="Inter"/>
+              </a:rPr>
+              <a:t>2026</a:t>
+            </a:r>
+          </a:p>
+        </p:txBody>
+      </p:sp>
+      <p:sp>
+        <p:nvSpPr>
+          <p:cNvPr id="6" name="TextBox 5"/>
+          <p:cNvSpPr txBox="1"/>
+          <p:nvPr/>
+        </p:nvSpPr>
+        <p:spPr>
+          <a:xfrm>
+            <a:off x="5120640" y="6355080"/>
+            <a:ext cx="4389120" cy="228600"/>
+          </a:xfrm>
+          <a:prstGeom prst="rect">
+            <a:avLst/>
+          </a:prstGeom>
+          <a:noFill/>
+        </p:spPr>
+        <p:txBody>
+          <a:bodyPr wrap="square" anchor="t" lIns="0" rIns="0" tIns="0" bIns="0">
+            <a:spAutoFit/>
+          </a:bodyPr>
+          <a:lstStyle/>
+          <a:p>
+            <a:pPr algn="ctr">
+              <a:lnSpc>
+                <a:spcPct val="100000"/>
+              </a:lnSpc>
+              <a:spcAft>
+                <a:spcPts val="600"/>
+              </a:spcAft>
+            </a:pPr>
+            <a:r>
+              <a:rPr sz="900" b="0">
+                <a:solidFill>
+                  <a:srgbClr val="666666"/>
+                </a:solidFill>
+                <a:latin typeface="Inter"/>
+              </a:rPr>
+              <a:t>QR Code Generation &amp; Scanning  ·  Seminar 1</a:t>
+            </a:r>
+          </a:p>
+        </p:txBody>
+      </p:sp>
+      <p:sp>
+        <p:nvSpPr>
+          <p:cNvPr id="7" name="TextBox 6"/>
+          <p:cNvSpPr txBox="1"/>
+          <p:nvPr/>
+        </p:nvSpPr>
+        <p:spPr>
+          <a:xfrm>
+            <a:off x="9144000" y="6355080"/>
+            <a:ext cx="2377440" cy="228600"/>
+          </a:xfrm>
+          <a:prstGeom prst="rect">
+            <a:avLst/>
+          </a:prstGeom>
+          <a:noFill/>
+        </p:spPr>
+        <p:txBody>
+          <a:bodyPr wrap="square" anchor="t" lIns="0" rIns="0" tIns="0" bIns="0">
+            <a:spAutoFit/>
+          </a:bodyPr>
+          <a:lstStyle/>
+          <a:p>
+            <a:pPr algn="r">
+              <a:lnSpc>
+                <a:spcPct val="100000"/>
+              </a:lnSpc>
+              <a:spcAft>
+                <a:spcPts val="600"/>
+              </a:spcAft>
+            </a:pPr>
+            <a:r>
+              <a:rPr sz="900" b="0">
+                <a:solidFill>
+                  <a:srgbClr val="666666"/>
+                </a:solidFill>
+                <a:latin typeface="Inter"/>
+              </a:rPr>
+              <a:t>17</a:t>
+            </a:r>
+          </a:p>
+        </p:txBody>
+      </p:sp>
+      <p:graphicFrame>
+        <p:nvGraphicFramePr>
+          <p:cNvPr id="8" name="Table 7"/>
+          <p:cNvGraphicFramePr>
+            <a:graphicFrameLocks noGrp="1"/>
+          </p:cNvGraphicFramePr>
+          <p:nvPr/>
+        </p:nvGraphicFramePr>
+        <p:xfrm>
+          <a:off x="670560" y="1371600"/>
+          <a:ext cx="10850880" cy="3621024"/>
+        </p:xfrm>
+        <a:graphic>
+          <a:graphicData uri="http://schemas.openxmlformats.org/drawingml/2006/table">
+            <a:tbl>
+              <a:tblPr firstRow="1">
+                <a:tableStyleId>{5C22544A-7EE6-4342-B048-85BDC9FD1C3A}</a:tableStyleId>
+              </a:tblPr>
+              <a:tblGrid>
+                <a:gridCol w="914400"/>
+                <a:gridCol w="4754880"/>
+                <a:gridCol w="5181600"/>
+              </a:tblGrid>
+              <a:tr h="603504">
+                <a:tc>
+                  <a:txBody>
+                    <a:bodyPr wrap="square"/>
+                    <a:lstStyle/>
+                    <a:p>
+                      <a:pPr algn="l">
+                        <a:lnSpc>
+                          <a:spcPct val="100000"/>
+                        </a:lnSpc>
+                      </a:pPr>
+                      <a:r>
+                        <a:rPr sz="1000" b="1">
+                          <a:solidFill>
+                            <a:srgbClr val="FFFFFF"/>
+                          </a:solidFill>
+                          <a:latin typeface="Inter"/>
+                        </a:rPr>
+                        <a:t>Bước</a:t>
+                      </a:r>
+                    </a:p>
+                  </a:txBody>
+                  <a:tcPr marL="82296" marR="82296" marT="27432" marB="27432" anchor="ctr">
+                    <a:solidFill>
+                      <a:srgbClr val="333333"/>
+                    </a:solidFill>
+                    <a:lnB w="6350" cap="flat" cmpd="sng" algn="ctr">
+                      <a:solidFill>
+                        <a:srgbClr val="DDDDDD"/>
+                      </a:solidFill>
+                    </a:lnB>
+                  </a:tcPr>
+                </a:tc>
+                <a:tc>
+                  <a:txBody>
+                    <a:bodyPr wrap="square"/>
+                    <a:lstStyle/>
+                    <a:p>
+                      <a:pPr algn="l">
+                        <a:lnSpc>
+                          <a:spcPct val="100000"/>
+                        </a:lnSpc>
+                      </a:pPr>
+                      <a:r>
+                        <a:rPr sz="1000" b="1">
+                          <a:solidFill>
+                            <a:srgbClr val="FFFFFF"/>
+                          </a:solidFill>
+                          <a:latin typeface="Inter"/>
+                        </a:rPr>
+                        <a:t>Lệnh / thao tác</a:t>
+                      </a:r>
+                    </a:p>
+                  </a:txBody>
+                  <a:tcPr marL="82296" marR="82296" marT="27432" marB="27432" anchor="ctr">
+                    <a:solidFill>
+                      <a:srgbClr val="333333"/>
+                    </a:solidFill>
+                    <a:lnB w="6350" cap="flat" cmpd="sng" algn="ctr">
+                      <a:solidFill>
+                        <a:srgbClr val="DDDDDD"/>
+                      </a:solidFill>
+                    </a:lnB>
+                  </a:tcPr>
+                </a:tc>
+                <a:tc>
+                  <a:txBody>
+                    <a:bodyPr wrap="square"/>
+                    <a:lstStyle/>
+                    <a:p>
+                      <a:pPr algn="l">
+                        <a:lnSpc>
+                          <a:spcPct val="100000"/>
+                        </a:lnSpc>
+                      </a:pPr>
+                      <a:r>
+                        <a:rPr sz="1000" b="1">
+                          <a:solidFill>
+                            <a:srgbClr val="FFFFFF"/>
+                          </a:solidFill>
+                          <a:latin typeface="Inter"/>
+                        </a:rPr>
+                        <a:t>Kết quả</a:t>
+                      </a:r>
+                    </a:p>
+                  </a:txBody>
+                  <a:tcPr marL="82296" marR="82296" marT="27432" marB="27432" anchor="ctr">
+                    <a:solidFill>
+                      <a:srgbClr val="333333"/>
+                    </a:solidFill>
+                    <a:lnB w="6350" cap="flat" cmpd="sng" algn="ctr">
+                      <a:solidFill>
+                        <a:srgbClr val="DDDDDD"/>
+                      </a:solidFill>
+                    </a:lnB>
+                  </a:tcPr>
+                </a:tc>
+              </a:tr>
+              <a:tr h="603504">
+                <a:tc>
+                  <a:txBody>
+                    <a:bodyPr wrap="square"/>
+                    <a:lstStyle/>
+                    <a:p>
+                      <a:pPr algn="l">
+                        <a:lnSpc>
+                          <a:spcPct val="100000"/>
+                        </a:lnSpc>
+                      </a:pPr>
+                      <a:r>
+                        <a:rPr sz="1000" b="0">
+                          <a:solidFill>
+                            <a:srgbClr val="1A1A1A"/>
+                          </a:solidFill>
+                          <a:latin typeface="Inter"/>
+                        </a:rPr>
+                        <a:t>1</a:t>
+                      </a:r>
+                    </a:p>
+                  </a:txBody>
+                  <a:tcPr marL="82296" marR="82296" marT="27432" marB="27432" anchor="ctr">
+                    <a:solidFill>
+                      <a:srgbClr val="FFFFFF"/>
+                    </a:solidFill>
+                    <a:lnB w="6350" cap="flat" cmpd="sng" algn="ctr">
+                      <a:solidFill>
+                        <a:srgbClr val="DDDDDD"/>
+                      </a:solidFill>
+                    </a:lnB>
+                  </a:tcPr>
+                </a:tc>
+                <a:tc>
+                  <a:txBody>
+                    <a:bodyPr wrap="square"/>
+                    <a:lstStyle/>
+                    <a:p>
+                      <a:pPr algn="l">
+                        <a:lnSpc>
+                          <a:spcPct val="100000"/>
+                        </a:lnSpc>
+                      </a:pPr>
+                      <a:r>
+                        <a:rPr sz="1000" b="0">
+                          <a:solidFill>
+                            <a:srgbClr val="1A1A1A"/>
+                          </a:solidFill>
+                          <a:latin typeface="Inter"/>
+                        </a:rPr>
+                        <a:t>ngrok config add-authtoken &lt;TOKEN&gt; (một lần)</a:t>
+                      </a:r>
+                    </a:p>
+                  </a:txBody>
+                  <a:tcPr marL="82296" marR="82296" marT="27432" marB="27432" anchor="ctr">
+                    <a:solidFill>
+                      <a:srgbClr val="FFFFFF"/>
+                    </a:solidFill>
+                    <a:lnB w="6350" cap="flat" cmpd="sng" algn="ctr">
+                      <a:solidFill>
+                        <a:srgbClr val="DDDDDD"/>
+                      </a:solidFill>
+                    </a:lnB>
+                  </a:tcPr>
+                </a:tc>
+                <a:tc>
+                  <a:txBody>
+                    <a:bodyPr wrap="square"/>
+                    <a:lstStyle/>
+                    <a:p>
+                      <a:pPr algn="l">
+                        <a:lnSpc>
+                          <a:spcPct val="100000"/>
+                        </a:lnSpc>
+                      </a:pPr>
+                      <a:r>
+                        <a:rPr sz="1000" b="0">
+                          <a:solidFill>
+                            <a:srgbClr val="1A1A1A"/>
+                          </a:solidFill>
+                          <a:latin typeface="Inter"/>
+                        </a:rPr>
+                        <a:t>Cần để quét QR bằng điện thoại</a:t>
+                      </a:r>
+                    </a:p>
+                  </a:txBody>
+                  <a:tcPr marL="82296" marR="82296" marT="27432" marB="27432" anchor="ctr">
+                    <a:solidFill>
+                      <a:srgbClr val="FFFFFF"/>
+                    </a:solidFill>
+                    <a:lnB w="6350" cap="flat" cmpd="sng" algn="ctr">
+                      <a:solidFill>
+                        <a:srgbClr val="DDDDDD"/>
+                      </a:solidFill>
+                    </a:lnB>
+                  </a:tcPr>
+                </a:tc>
+              </a:tr>
+              <a:tr h="603504">
+                <a:tc>
+                  <a:txBody>
+                    <a:bodyPr wrap="square"/>
+                    <a:lstStyle/>
+                    <a:p>
+                      <a:pPr algn="l">
+                        <a:lnSpc>
+                          <a:spcPct val="100000"/>
+                        </a:lnSpc>
+                      </a:pPr>
+                      <a:r>
+                        <a:rPr sz="1000" b="0">
+                          <a:solidFill>
+                            <a:srgbClr val="1A1A1A"/>
+                          </a:solidFill>
+                          <a:latin typeface="Inter"/>
+                        </a:rPr>
+                        <a:t>2</a:t>
+                      </a:r>
+                    </a:p>
+                  </a:txBody>
+                  <a:tcPr marL="82296" marR="82296" marT="27432" marB="27432" anchor="ctr">
+                    <a:solidFill>
+                      <a:srgbClr val="FFFFFF"/>
+                    </a:solidFill>
+                    <a:lnB w="6350" cap="flat" cmpd="sng" algn="ctr">
+                      <a:solidFill>
+                        <a:srgbClr val="DDDDDD"/>
+                      </a:solidFill>
+                    </a:lnB>
+                  </a:tcPr>
+                </a:tc>
+                <a:tc>
+                  <a:txBody>
+                    <a:bodyPr wrap="square"/>
+                    <a:lstStyle/>
+                    <a:p>
+                      <a:pPr algn="l">
+                        <a:lnSpc>
+                          <a:spcPct val="100000"/>
+                        </a:lnSpc>
+                      </a:pPr>
+                      <a:r>
+                        <a:rPr sz="1000" b="0">
+                          <a:solidFill>
+                            <a:srgbClr val="1A1A1A"/>
+                          </a:solidFill>
+                          <a:latin typeface="Inter"/>
+                        </a:rPr>
+                        <a:t>Tại thư mục gốc: .\run.ps1</a:t>
+                      </a:r>
+                    </a:p>
+                  </a:txBody>
+                  <a:tcPr marL="82296" marR="82296" marT="27432" marB="27432" anchor="ctr">
+                    <a:solidFill>
+                      <a:srgbClr val="FFFFFF"/>
+                    </a:solidFill>
+                    <a:lnB w="6350" cap="flat" cmpd="sng" algn="ctr">
+                      <a:solidFill>
+                        <a:srgbClr val="DDDDDD"/>
+                      </a:solidFill>
+                    </a:lnB>
+                  </a:tcPr>
+                </a:tc>
+                <a:tc>
+                  <a:txBody>
+                    <a:bodyPr wrap="square"/>
+                    <a:lstStyle/>
+                    <a:p>
+                      <a:pPr algn="l">
+                        <a:lnSpc>
+                          <a:spcPct val="100000"/>
+                        </a:lnSpc>
+                      </a:pPr>
+                      <a:r>
+                        <a:rPr sz="1000" b="0">
+                          <a:solidFill>
+                            <a:srgbClr val="1A1A1A"/>
+                          </a:solidFill>
+                          <a:latin typeface="Inter"/>
+                        </a:rPr>
+                        <a:t>Tạo .venv, cài requirements, chạy server</a:t>
+                      </a:r>
+                    </a:p>
+                  </a:txBody>
+                  <a:tcPr marL="82296" marR="82296" marT="27432" marB="27432" anchor="ctr">
+                    <a:solidFill>
+                      <a:srgbClr val="FFFFFF"/>
+                    </a:solidFill>
+                    <a:lnB w="6350" cap="flat" cmpd="sng" algn="ctr">
+                      <a:solidFill>
+                        <a:srgbClr val="DDDDDD"/>
+                      </a:solidFill>
+                    </a:lnB>
+                  </a:tcPr>
+                </a:tc>
+              </a:tr>
+              <a:tr h="603504">
+                <a:tc>
+                  <a:txBody>
+                    <a:bodyPr wrap="square"/>
+                    <a:lstStyle/>
+                    <a:p>
+                      <a:pPr algn="l">
+                        <a:lnSpc>
+                          <a:spcPct val="100000"/>
+                        </a:lnSpc>
+                      </a:pPr>
+                      <a:r>
+                        <a:rPr sz="1000" b="0">
+                          <a:solidFill>
+                            <a:srgbClr val="1A1A1A"/>
+                          </a:solidFill>
+                          <a:latin typeface="Inter"/>
+                        </a:rPr>
+                        <a:t>3</a:t>
+                      </a:r>
+                    </a:p>
+                  </a:txBody>
+                  <a:tcPr marL="82296" marR="82296" marT="27432" marB="27432" anchor="ctr">
+                    <a:solidFill>
+                      <a:srgbClr val="FFFFFF"/>
+                    </a:solidFill>
+                    <a:lnB w="6350" cap="flat" cmpd="sng" algn="ctr">
+                      <a:solidFill>
+                        <a:srgbClr val="DDDDDD"/>
+                      </a:solidFill>
+                    </a:lnB>
+                  </a:tcPr>
+                </a:tc>
+                <a:tc>
+                  <a:txBody>
+                    <a:bodyPr wrap="square"/>
+                    <a:lstStyle/>
+                    <a:p>
+                      <a:pPr algn="l">
+                        <a:lnSpc>
+                          <a:spcPct val="100000"/>
+                        </a:lnSpc>
+                      </a:pPr>
+                      <a:r>
+                        <a:rPr sz="1000" b="0">
+                          <a:solidFill>
+                            <a:srgbClr val="1A1A1A"/>
+                          </a:solidFill>
+                          <a:latin typeface="Inter"/>
+                        </a:rPr>
+                        <a:t>Mở /docs hoặc web UI; POST /api/qr</a:t>
+                      </a:r>
+                    </a:p>
+                  </a:txBody>
+                  <a:tcPr marL="82296" marR="82296" marT="27432" marB="27432" anchor="ctr">
+                    <a:solidFill>
+                      <a:srgbClr val="FFFFFF"/>
+                    </a:solidFill>
+                    <a:lnB w="6350" cap="flat" cmpd="sng" algn="ctr">
+                      <a:solidFill>
+                        <a:srgbClr val="DDDDDD"/>
+                      </a:solidFill>
+                    </a:lnB>
+                  </a:tcPr>
+                </a:tc>
+                <a:tc>
+                  <a:txBody>
+                    <a:bodyPr wrap="square"/>
+                    <a:lstStyle/>
+                    <a:p>
+                      <a:pPr algn="l">
+                        <a:lnSpc>
+                          <a:spcPct val="100000"/>
+                        </a:lnSpc>
+                      </a:pPr>
+                      <a:r>
+                        <a:rPr sz="1000" b="0">
+                          <a:solidFill>
+                            <a:srgbClr val="1A1A1A"/>
+                          </a:solidFill>
+                          <a:latin typeface="Inter"/>
+                        </a:rPr>
+                        <a:t>201 + token + PNG + expiresAt</a:t>
+                      </a:r>
+                    </a:p>
+                  </a:txBody>
+                  <a:tcPr marL="82296" marR="82296" marT="27432" marB="27432" anchor="ctr">
+                    <a:solidFill>
+                      <a:srgbClr val="FFFFFF"/>
+                    </a:solidFill>
+                    <a:lnB w="6350" cap="flat" cmpd="sng" algn="ctr">
+                      <a:solidFill>
+                        <a:srgbClr val="DDDDDD"/>
+                      </a:solidFill>
+                    </a:lnB>
+                  </a:tcPr>
+                </a:tc>
+              </a:tr>
+              <a:tr h="603504">
+                <a:tc>
+                  <a:txBody>
+                    <a:bodyPr wrap="square"/>
+                    <a:lstStyle/>
+                    <a:p>
+                      <a:pPr algn="l">
+                        <a:lnSpc>
+                          <a:spcPct val="100000"/>
+                        </a:lnSpc>
+                      </a:pPr>
+                      <a:r>
+                        <a:rPr sz="1000" b="0">
+                          <a:solidFill>
+                            <a:srgbClr val="1A1A1A"/>
+                          </a:solidFill>
+                          <a:latin typeface="Inter"/>
+                        </a:rPr>
+                        <a:t>4</a:t>
+                      </a:r>
+                    </a:p>
+                  </a:txBody>
+                  <a:tcPr marL="82296" marR="82296" marT="27432" marB="27432" anchor="ctr">
+                    <a:solidFill>
+                      <a:srgbClr val="FFFFFF"/>
+                    </a:solidFill>
+                    <a:lnB w="6350" cap="flat" cmpd="sng" algn="ctr">
+                      <a:solidFill>
+                        <a:srgbClr val="DDDDDD"/>
+                      </a:solidFill>
+                    </a:lnB>
+                  </a:tcPr>
+                </a:tc>
+                <a:tc>
+                  <a:txBody>
+                    <a:bodyPr wrap="square"/>
+                    <a:lstStyle/>
+                    <a:p>
+                      <a:pPr algn="l">
+                        <a:lnSpc>
+                          <a:spcPct val="100000"/>
+                        </a:lnSpc>
+                      </a:pPr>
+                      <a:r>
+                        <a:rPr sz="1000" b="0">
+                          <a:solidFill>
+                            <a:srgbClr val="1A1A1A"/>
+                          </a:solidFill>
+                          <a:latin typeface="Inter"/>
+                        </a:rPr>
+                        <a:t>Mở /t/{token}; check-in hai lần</a:t>
+                      </a:r>
+                    </a:p>
+                  </a:txBody>
+                  <a:tcPr marL="82296" marR="82296" marT="27432" marB="27432" anchor="ctr">
+                    <a:solidFill>
+                      <a:srgbClr val="FFFFFF"/>
+                    </a:solidFill>
+                    <a:lnB w="6350" cap="flat" cmpd="sng" algn="ctr">
+                      <a:solidFill>
+                        <a:srgbClr val="DDDDDD"/>
+                      </a:solidFill>
+                    </a:lnB>
+                  </a:tcPr>
+                </a:tc>
+                <a:tc>
+                  <a:txBody>
+                    <a:bodyPr wrap="square"/>
+                    <a:lstStyle/>
+                    <a:p>
+                      <a:pPr algn="l">
+                        <a:lnSpc>
+                          <a:spcPct val="100000"/>
+                        </a:lnSpc>
+                      </a:pPr>
+                      <a:r>
+                        <a:rPr sz="1000" b="0">
+                          <a:solidFill>
+                            <a:srgbClr val="1A1A1A"/>
+                          </a:solidFill>
+                          <a:latin typeface="Inter"/>
+                        </a:rPr>
+                        <a:t>200 lần đầu, 409 lần sau; PRODUCT → 400</a:t>
+                      </a:r>
+                    </a:p>
+                  </a:txBody>
+                  <a:tcPr marL="82296" marR="82296" marT="27432" marB="27432" anchor="ctr">
+                    <a:solidFill>
+                      <a:srgbClr val="FFFFFF"/>
+                    </a:solidFill>
+                    <a:lnB w="6350" cap="flat" cmpd="sng" algn="ctr">
+                      <a:solidFill>
+                        <a:srgbClr val="DDDDDD"/>
+                      </a:solidFill>
+                    </a:lnB>
+                  </a:tcPr>
+                </a:tc>
+              </a:tr>
+              <a:tr h="603504">
+                <a:tc>
+                  <a:txBody>
+                    <a:bodyPr wrap="square"/>
+                    <a:lstStyle/>
+                    <a:p>
+                      <a:pPr algn="l">
+                        <a:lnSpc>
+                          <a:spcPct val="100000"/>
+                        </a:lnSpc>
+                      </a:pPr>
+                      <a:r>
+                        <a:rPr sz="1000" b="0">
+                          <a:solidFill>
+                            <a:srgbClr val="1A1A1A"/>
+                          </a:solidFill>
+                          <a:latin typeface="Inter"/>
+                        </a:rPr>
+                        <a:t>5</a:t>
+                      </a:r>
+                    </a:p>
+                  </a:txBody>
+                  <a:tcPr marL="82296" marR="82296" marT="27432" marB="27432" anchor="ctr">
+                    <a:solidFill>
+                      <a:srgbClr val="FFFFFF"/>
+                    </a:solidFill>
+                    <a:lnB w="6350" cap="flat" cmpd="sng" algn="ctr">
+                      <a:solidFill>
+                        <a:srgbClr val="DDDDDD"/>
+                      </a:solidFill>
+                    </a:lnB>
+                  </a:tcPr>
+                </a:tc>
+                <a:tc>
+                  <a:txBody>
+                    <a:bodyPr wrap="square"/>
+                    <a:lstStyle/>
+                    <a:p>
+                      <a:pPr algn="l">
+                        <a:lnSpc>
+                          <a:spcPct val="100000"/>
+                        </a:lnSpc>
+                      </a:pPr>
+                      <a:r>
+                        <a:rPr sz="1000" b="0">
+                          <a:solidFill>
+                            <a:srgbClr val="1A1A1A"/>
+                          </a:solidFill>
+                          <a:latin typeface="Inter"/>
+                        </a:rPr>
+                        <a:t>cd demo; python -m pytest</a:t>
+                      </a:r>
+                    </a:p>
+                  </a:txBody>
+                  <a:tcPr marL="82296" marR="82296" marT="27432" marB="27432" anchor="ctr">
+                    <a:solidFill>
+                      <a:srgbClr val="FFFFFF"/>
+                    </a:solidFill>
+                    <a:lnB w="6350" cap="flat" cmpd="sng" algn="ctr">
+                      <a:solidFill>
+                        <a:srgbClr val="DDDDDD"/>
+                      </a:solidFill>
+                    </a:lnB>
+                  </a:tcPr>
+                </a:tc>
+                <a:tc>
+                  <a:txBody>
+                    <a:bodyPr wrap="square"/>
+                    <a:lstStyle/>
+                    <a:p>
+                      <a:pPr algn="l">
+                        <a:lnSpc>
+                          <a:spcPct val="100000"/>
+                        </a:lnSpc>
+                      </a:pPr>
+                      <a:r>
+                        <a:rPr sz="1000" b="0">
+                          <a:solidFill>
+                            <a:srgbClr val="1A1A1A"/>
+                          </a:solidFill>
+                          <a:latin typeface="Inter"/>
+                        </a:rPr>
+                        <a:t>Kiểm tra API, ticket, stats và reset</a:t>
+                      </a:r>
+                    </a:p>
+                  </a:txBody>
+                  <a:tcPr marL="82296" marR="82296" marT="27432" marB="27432" anchor="ctr">
+                    <a:solidFill>
+                      <a:srgbClr val="FFFFFF"/>
+                    </a:solidFill>
+                    <a:lnB w="6350" cap="flat" cmpd="sng" algn="ctr">
+                      <a:solidFill>
+                        <a:srgbClr val="DDDDDD"/>
+                      </a:solidFill>
+                    </a:lnB>
+                  </a:tcPr>
+                </a:tc>
+              </a:tr>
+            </a:tbl>
+          </a:graphicData>
+        </a:graphic>
+      </p:graphicFrame>
+      <p:sp>
+        <p:nvSpPr>
+          <p:cNvPr id="9" name="Rectangle 8"/>
+          <p:cNvSpPr/>
+          <p:nvPr/>
+        </p:nvSpPr>
+        <p:spPr>
+          <a:xfrm>
+            <a:off x="670560" y="5257800"/>
+            <a:ext cx="10850880" cy="548640"/>
+          </a:xfrm>
+          <a:prstGeom prst="rect">
+            <a:avLst/>
+          </a:prstGeom>
+          <a:solidFill>
+            <a:srgbClr val="EEEEEE"/>
+          </a:solidFill>
+          <a:ln>
+            <a:noFill/>
+          </a:ln>
+          <a:effectLst/>
+        </p:spPr>
+        <p:style>
+          <a:lnRef idx="1">
+            <a:schemeClr val="accent1"/>
+          </a:lnRef>
+          <a:fillRef idx="3">
+            <a:schemeClr val="accent1"/>
+          </a:fillRef>
+          <a:effectRef idx="2">
+            <a:schemeClr val="accent1"/>
+          </a:effectRef>
+          <a:fontRef idx="minor">
+            <a:schemeClr val="lt1"/>
+          </a:fontRef>
+        </p:style>
+        <p:txBody>
+          <a:bodyPr rtlCol="0" anchor="ctr"/>
+          <a:lstStyle/>
+          <a:p>
+            <a:pPr algn="ctr"/>
+          </a:p>
+        </p:txBody>
+      </p:sp>
+      <p:sp>
+        <p:nvSpPr>
+          <p:cNvPr id="10" name="TextBox 9"/>
+          <p:cNvSpPr txBox="1"/>
+          <p:nvPr/>
+        </p:nvSpPr>
+        <p:spPr>
+          <a:xfrm>
+            <a:off x="890016" y="5376672"/>
+            <a:ext cx="10411968" cy="365759"/>
+          </a:xfrm>
+          <a:prstGeom prst="rect">
+            <a:avLst/>
+          </a:prstGeom>
+          <a:noFill/>
+        </p:spPr>
+        <p:txBody>
+          <a:bodyPr wrap="square" anchor="t" lIns="0" rIns="0" tIns="0" bIns="0">
+            <a:spAutoFit/>
+          </a:bodyPr>
+          <a:lstStyle/>
+          <a:p>
+            <a:pPr algn="l">
+              <a:lnSpc>
+                <a:spcPct val="100000"/>
+              </a:lnSpc>
+              <a:spcAft>
+                <a:spcPts val="600"/>
+              </a:spcAft>
+            </a:pPr>
+            <a:r>
+              <a:rPr sz="1200" b="1">
+                <a:solidFill>
+                  <a:srgbClr val="333333"/>
+                </a:solidFill>
+                <a:latin typeface="Inter"/>
+              </a:rPr>
+              <a:t>Local only: set $env:USE_NGROK="0" before .\run.ps1. Phone scan needs Internet and a configured ngrok authtoken.</a:t>
             </a:r>
           </a:p>
         </p:txBody>
@@ -9233,7 +10902,7 @@
         </p:blipFill>
         <p:spPr>
           <a:xfrm>
-            <a:off x="36576" y="27432"/>
+            <a:off x="48768" y="27432"/>
             <a:ext cx="1709928" cy="941832"/>
           </a:xfrm>
           <a:prstGeom prst="rect">
@@ -9249,8 +10918,8 @@
         </p:nvSpPr>
         <p:spPr>
           <a:xfrm>
-            <a:off x="1746504" y="512064"/>
-            <a:ext cx="6894576" cy="457200"/>
+            <a:off x="2328672" y="512064"/>
+            <a:ext cx="9192768" cy="457200"/>
           </a:xfrm>
           <a:prstGeom prst="rect">
             <a:avLst/>
@@ -9291,8 +10960,8 @@
         </p:nvSpPr>
         <p:spPr>
           <a:xfrm>
-            <a:off x="502920" y="1115568"/>
-            <a:ext cx="8138160" cy="27432"/>
+            <a:off x="670560" y="1115568"/>
+            <a:ext cx="10850880" cy="27432"/>
           </a:xfrm>
           <a:prstGeom prst="rect">
             <a:avLst/>
@@ -9335,8 +11004,8 @@
         </p:nvSpPr>
         <p:spPr>
           <a:xfrm>
-            <a:off x="502920" y="6355080"/>
-            <a:ext cx="1463040" cy="228600"/>
+            <a:off x="670560" y="6355080"/>
+            <a:ext cx="1950720" cy="228600"/>
           </a:xfrm>
           <a:prstGeom prst="rect">
             <a:avLst/>
@@ -9364,7 +11033,7 @@
                 </a:solidFill>
                 <a:latin typeface="Inter"/>
               </a:rPr>
-              <a:t>05/10/2026</a:t>
+              <a:t>2026</a:t>
             </a:r>
           </a:p>
         </p:txBody>
@@ -9377,8 +11046,8 @@
         </p:nvSpPr>
         <p:spPr>
           <a:xfrm>
-            <a:off x="3840480" y="6355080"/>
-            <a:ext cx="3291840" cy="228600"/>
+            <a:off x="5120640" y="6355080"/>
+            <a:ext cx="4389120" cy="228600"/>
           </a:xfrm>
           <a:prstGeom prst="rect">
             <a:avLst/>
@@ -9419,8 +11088,8 @@
         </p:nvSpPr>
         <p:spPr>
           <a:xfrm>
-            <a:off x="6858000" y="6355080"/>
-            <a:ext cx="1783080" cy="228600"/>
+            <a:off x="9144000" y="6355080"/>
+            <a:ext cx="2377440" cy="228600"/>
           </a:xfrm>
           <a:prstGeom prst="rect">
             <a:avLst/>
@@ -9462,8 +11131,8 @@
           <p:nvPr/>
         </p:nvGraphicFramePr>
         <p:xfrm>
-          <a:off x="502920" y="1371600"/>
-          <a:ext cx="8138160" cy="4023360"/>
+          <a:off x="670560" y="1371600"/>
+          <a:ext cx="10850880" cy="4023360"/>
         </p:xfrm>
         <a:graphic>
           <a:graphicData uri="http://schemas.openxmlformats.org/drawingml/2006/table">
@@ -9472,9 +11141,9 @@
                 <a:tableStyleId>{5C22544A-7EE6-4342-B048-85BDC9FD1C3A}</a:tableStyleId>
               </a:tblPr>
               <a:tblGrid>
-                <a:gridCol w="640080"/>
-                <a:gridCol w="5394960"/>
-                <a:gridCol w="2103120"/>
+                <a:gridCol w="853440"/>
+                <a:gridCol w="7193280"/>
+                <a:gridCol w="2804160"/>
               </a:tblGrid>
               <a:tr h="502920">
                 <a:tc>
@@ -9950,7 +11619,7 @@
                           </a:solidFill>
                           <a:latin typeface="Inter"/>
                         </a:rPr>
-                        <a:t>6 phút</a:t>
+                        <a:t>5 phút</a:t>
                       </a:r>
                     </a:p>
                   </a:txBody>
@@ -9985,6 +11654,104 @@
                           <a:latin typeface="Inter"/>
                         </a:rPr>
                         <a:t>05</a:t>
+                      </a:r>
+                    </a:p>
+                  </a:txBody>
+                  <a:tcPr marL="82296" marR="82296" marT="27432" marB="27432" anchor="ctr">
+                    <a:solidFill>
+                      <a:srgbClr val="FFFFFF"/>
+                    </a:solidFill>
+                    <a:lnB w="6350" cap="flat" cmpd="sng" algn="ctr">
+                      <a:solidFill>
+                        <a:srgbClr val="DDDDDD"/>
+                      </a:solidFill>
+                    </a:lnB>
+                  </a:tcPr>
+                </a:tc>
+                <a:tc>
+                  <a:txBody>
+                    <a:bodyPr wrap="square"/>
+                    <a:lstStyle/>
+                    <a:p>
+                      <a:pPr algn="l">
+                        <a:lnSpc>
+                          <a:spcPct val="100000"/>
+                        </a:lnSpc>
+                      </a:pPr>
+                      <a:r>
+                        <a:rPr sz="1050" b="0">
+                          <a:solidFill>
+                            <a:srgbClr val="1A1A1A"/>
+                          </a:solidFill>
+                          <a:latin typeface="Inter"/>
+                        </a:rPr>
+                        <a:t>CODE TOUR — app.py + reproducibility</a:t>
+                      </a:r>
+                    </a:p>
+                  </a:txBody>
+                  <a:tcPr marL="82296" marR="82296" marT="27432" marB="27432" anchor="ctr">
+                    <a:solidFill>
+                      <a:srgbClr val="FFFFFF"/>
+                    </a:solidFill>
+                    <a:lnB w="6350" cap="flat" cmpd="sng" algn="ctr">
+                      <a:solidFill>
+                        <a:srgbClr val="DDDDDD"/>
+                      </a:solidFill>
+                    </a:lnB>
+                  </a:tcPr>
+                </a:tc>
+                <a:tc>
+                  <a:txBody>
+                    <a:bodyPr wrap="square"/>
+                    <a:lstStyle/>
+                    <a:p>
+                      <a:pPr algn="ctr">
+                        <a:lnSpc>
+                          <a:spcPct val="100000"/>
+                        </a:lnSpc>
+                      </a:pPr>
+                      <a:r>
+                        <a:rPr sz="1050" b="0">
+                          <a:solidFill>
+                            <a:srgbClr val="1A1A1A"/>
+                          </a:solidFill>
+                          <a:latin typeface="Inter"/>
+                        </a:rPr>
+                        <a:t>3 phút</a:t>
+                      </a:r>
+                    </a:p>
+                  </a:txBody>
+                  <a:tcPr marL="82296" marR="82296" marT="27432" marB="27432" anchor="ctr">
+                    <a:solidFill>
+                      <a:srgbClr val="FFFFFF"/>
+                    </a:solidFill>
+                    <a:lnB w="6350" cap="flat" cmpd="sng" algn="ctr">
+                      <a:solidFill>
+                        <a:srgbClr val="DDDDDD"/>
+                      </a:solidFill>
+                    </a:lnB>
+                  </a:tcPr>
+                </a:tc>
+              </a:tr>
+              <a:tr h="502920">
+                <a:tc>
+                  <a:txBody>
+                    <a:bodyPr wrap="square"/>
+                    <a:lstStyle/>
+                    <a:p>
+                      <a:pPr algn="ctr">
+                        <a:lnSpc>
+                          <a:spcPct val="100000"/>
+                        </a:lnSpc>
+                      </a:pPr>
+                      <a:r>
+                        <a:rPr sz="1050" b="0">
+                          <a:solidFill>
+                            <a:srgbClr val="1A1A1A"/>
+                          </a:solidFill>
+                          <a:latin typeface="Inter"/>
+                        </a:rPr>
+                        <a:t>06</a:t>
                       </a:r>
                     </a:p>
                   </a:txBody>
@@ -10082,104 +11849,6 @@
                           </a:solidFill>
                           <a:latin typeface="Inter"/>
                         </a:rPr>
-                        <a:t>06</a:t>
-                      </a:r>
-                    </a:p>
-                  </a:txBody>
-                  <a:tcPr marL="82296" marR="82296" marT="27432" marB="27432" anchor="ctr">
-                    <a:solidFill>
-                      <a:srgbClr val="FFFFFF"/>
-                    </a:solidFill>
-                    <a:lnB w="6350" cap="flat" cmpd="sng" algn="ctr">
-                      <a:solidFill>
-                        <a:srgbClr val="DDDDDD"/>
-                      </a:solidFill>
-                    </a:lnB>
-                  </a:tcPr>
-                </a:tc>
-                <a:tc>
-                  <a:txBody>
-                    <a:bodyPr wrap="square"/>
-                    <a:lstStyle/>
-                    <a:p>
-                      <a:pPr algn="l">
-                        <a:lnSpc>
-                          <a:spcPct val="100000"/>
-                        </a:lnSpc>
-                      </a:pPr>
-                      <a:r>
-                        <a:rPr sz="1050" b="0">
-                          <a:solidFill>
-                            <a:srgbClr val="1A1A1A"/>
-                          </a:solidFill>
-                          <a:latin typeface="Inter"/>
-                        </a:rPr>
-                        <a:t>BEST PRACTICES &amp; LIMITATIONS</a:t>
-                      </a:r>
-                    </a:p>
-                  </a:txBody>
-                  <a:tcPr marL="82296" marR="82296" marT="27432" marB="27432" anchor="ctr">
-                    <a:solidFill>
-                      <a:srgbClr val="FFFFFF"/>
-                    </a:solidFill>
-                    <a:lnB w="6350" cap="flat" cmpd="sng" algn="ctr">
-                      <a:solidFill>
-                        <a:srgbClr val="DDDDDD"/>
-                      </a:solidFill>
-                    </a:lnB>
-                  </a:tcPr>
-                </a:tc>
-                <a:tc>
-                  <a:txBody>
-                    <a:bodyPr wrap="square"/>
-                    <a:lstStyle/>
-                    <a:p>
-                      <a:pPr algn="ctr">
-                        <a:lnSpc>
-                          <a:spcPct val="100000"/>
-                        </a:lnSpc>
-                      </a:pPr>
-                      <a:r>
-                        <a:rPr sz="1050" b="0">
-                          <a:solidFill>
-                            <a:srgbClr val="1A1A1A"/>
-                          </a:solidFill>
-                          <a:latin typeface="Inter"/>
-                        </a:rPr>
-                        <a:t>2 phút</a:t>
-                      </a:r>
-                    </a:p>
-                  </a:txBody>
-                  <a:tcPr marL="82296" marR="82296" marT="27432" marB="27432" anchor="ctr">
-                    <a:solidFill>
-                      <a:srgbClr val="FFFFFF"/>
-                    </a:solidFill>
-                    <a:lnB w="6350" cap="flat" cmpd="sng" algn="ctr">
-                      <a:solidFill>
-                        <a:srgbClr val="DDDDDD"/>
-                      </a:solidFill>
-                    </a:lnB>
-                  </a:tcPr>
-                </a:tc>
-              </a:tr>
-              <a:tr h="502920">
-                <a:tc>
-                  <a:txBody>
-                    <a:bodyPr wrap="square"/>
-                    <a:lstStyle/>
-                    <a:p>
-                      <a:pPr algn="ctr">
-                        <a:lnSpc>
-                          <a:spcPct val="100000"/>
-                        </a:lnSpc>
-                      </a:pPr>
-                      <a:r>
-                        <a:rPr sz="1050" b="0">
-                          <a:solidFill>
-                            <a:srgbClr val="1A1A1A"/>
-                          </a:solidFill>
-                          <a:latin typeface="Inter"/>
-                        </a:rPr>
                         <a:t>07</a:t>
                       </a:r>
                     </a:p>
@@ -10212,7 +11881,7 @@
                           </a:solidFill>
                           <a:latin typeface="Inter"/>
                         </a:rPr>
-                        <a:t>Q&amp;A và tài liệu tái sử dụng</a:t>
+                        <a:t>BEST PRACTICES, LIMITS &amp; Q&amp;A</a:t>
                       </a:r>
                     </a:p>
                   </a:txBody>
@@ -10244,7 +11913,7 @@
                           </a:solidFill>
                           <a:latin typeface="Inter"/>
                         </a:rPr>
-                        <a:t>3 phút</a:t>
+                        <a:t>4 phút</a:t>
                       </a:r>
                     </a:p>
                   </a:txBody>
@@ -10306,7 +11975,7 @@
         </p:blipFill>
         <p:spPr>
           <a:xfrm>
-            <a:off x="36576" y="27432"/>
+            <a:off x="48768" y="27432"/>
             <a:ext cx="1709928" cy="941832"/>
           </a:xfrm>
           <a:prstGeom prst="rect">
@@ -10322,8 +11991,8 @@
         </p:nvSpPr>
         <p:spPr>
           <a:xfrm>
-            <a:off x="1746504" y="512064"/>
-            <a:ext cx="6894576" cy="457200"/>
+            <a:off x="2328672" y="512064"/>
+            <a:ext cx="9192768" cy="457200"/>
           </a:xfrm>
           <a:prstGeom prst="rect">
             <a:avLst/>
@@ -10364,8 +12033,8 @@
         </p:nvSpPr>
         <p:spPr>
           <a:xfrm>
-            <a:off x="502920" y="1115568"/>
-            <a:ext cx="8138160" cy="27432"/>
+            <a:off x="670560" y="1115568"/>
+            <a:ext cx="10850880" cy="27432"/>
           </a:xfrm>
           <a:prstGeom prst="rect">
             <a:avLst/>
@@ -10408,8 +12077,8 @@
         </p:nvSpPr>
         <p:spPr>
           <a:xfrm>
-            <a:off x="502920" y="6355080"/>
-            <a:ext cx="1463040" cy="228600"/>
+            <a:off x="670560" y="6355080"/>
+            <a:ext cx="1950720" cy="228600"/>
           </a:xfrm>
           <a:prstGeom prst="rect">
             <a:avLst/>
@@ -10437,7 +12106,7 @@
                 </a:solidFill>
                 <a:latin typeface="Inter"/>
               </a:rPr>
-              <a:t>05/10/2026</a:t>
+              <a:t>2026</a:t>
             </a:r>
           </a:p>
         </p:txBody>
@@ -10450,8 +12119,8 @@
         </p:nvSpPr>
         <p:spPr>
           <a:xfrm>
-            <a:off x="3840480" y="6355080"/>
-            <a:ext cx="3291840" cy="228600"/>
+            <a:off x="5120640" y="6355080"/>
+            <a:ext cx="4389120" cy="228600"/>
           </a:xfrm>
           <a:prstGeom prst="rect">
             <a:avLst/>
@@ -10492,8 +12161,8 @@
         </p:nvSpPr>
         <p:spPr>
           <a:xfrm>
-            <a:off x="6858000" y="6355080"/>
-            <a:ext cx="1783080" cy="228600"/>
+            <a:off x="9144000" y="6355080"/>
+            <a:ext cx="2377440" cy="228600"/>
           </a:xfrm>
           <a:prstGeom prst="rect">
             <a:avLst/>
@@ -10534,8 +12203,8 @@
         </p:nvSpPr>
         <p:spPr>
           <a:xfrm>
-            <a:off x="502920" y="1325880"/>
-            <a:ext cx="4572000" cy="4480560"/>
+            <a:off x="670560" y="1325880"/>
+            <a:ext cx="6096000" cy="4480560"/>
           </a:xfrm>
           <a:prstGeom prst="rect">
             <a:avLst/>
@@ -10601,7 +12270,7 @@
                 </a:solidFill>
                 <a:latin typeface="Inter"/>
               </a:rPr>
-              <a:t>Ba chế độ mã hóa</a:t>
+              <a:t>Chế độ mã hóa</a:t>
             </a:r>
           </a:p>
           <a:p>
@@ -10620,7 +12289,7 @@
                 </a:solidFill>
                 <a:latin typeface="Inter"/>
               </a:rPr>
-              <a:t>Numeric · alphanumeric · byte (UTF-8). Dung lượng phụ thuộc version 1–40 và mức sửa lỗi L/M/Q/H.</a:t>
+              <a:t>Numeric · alphanumeric · byte (UTF-8) · Kanji. Version 1–40 và ECC L/M/Q/H quyết định dung lượng, khả năng phục hồi.</a:t>
             </a:r>
           </a:p>
           <a:p>
@@ -10696,7 +12365,7 @@
                 </a:solidFill>
                 <a:latin typeface="Inter"/>
               </a:rPr>
-              <a:t>ERROR_CORRECT_M · box_size = 8 · border = 4.</a:t>
+              <a:t>ERROR_CORRECT_M · box_size = 10 · border = 4.</a:t>
             </a:r>
           </a:p>
         </p:txBody>
@@ -10717,7 +12386,7 @@
         </p:blipFill>
         <p:spPr>
           <a:xfrm>
-            <a:off x="5486400" y="1417320"/>
+            <a:off x="7315200" y="1417320"/>
             <a:ext cx="2926080" cy="2926080"/>
           </a:xfrm>
           <a:prstGeom prst="rect">
@@ -10733,8 +12402,8 @@
         </p:nvSpPr>
         <p:spPr>
           <a:xfrm>
-            <a:off x="5120640" y="4434840"/>
-            <a:ext cx="3657600" cy="457200"/>
+            <a:off x="6827520" y="4434840"/>
+            <a:ext cx="4876800" cy="457200"/>
           </a:xfrm>
           <a:prstGeom prst="rect">
             <a:avLst/>
@@ -10775,8 +12444,8 @@
         </p:nvSpPr>
         <p:spPr>
           <a:xfrm>
-            <a:off x="502920" y="5074920"/>
-            <a:ext cx="8138160" cy="502920"/>
+            <a:off x="670560" y="5074920"/>
+            <a:ext cx="10850880" cy="502920"/>
           </a:xfrm>
           <a:prstGeom prst="rect">
             <a:avLst/>
@@ -10819,8 +12488,8 @@
         </p:nvSpPr>
         <p:spPr>
           <a:xfrm>
-            <a:off x="667512" y="5193792"/>
-            <a:ext cx="7808976" cy="320040"/>
+            <a:off x="890016" y="5193792"/>
+            <a:ext cx="10411968" cy="320040"/>
           </a:xfrm>
           <a:prstGeom prst="rect">
             <a:avLst/>
@@ -10895,7 +12564,7 @@
         </p:blipFill>
         <p:spPr>
           <a:xfrm>
-            <a:off x="36576" y="27432"/>
+            <a:off x="48768" y="27432"/>
             <a:ext cx="1709928" cy="941832"/>
           </a:xfrm>
           <a:prstGeom prst="rect">
@@ -10911,8 +12580,8 @@
         </p:nvSpPr>
         <p:spPr>
           <a:xfrm>
-            <a:off x="1746504" y="512064"/>
-            <a:ext cx="6894576" cy="457200"/>
+            <a:off x="2328672" y="512064"/>
+            <a:ext cx="9192768" cy="457200"/>
           </a:xfrm>
           <a:prstGeom prst="rect">
             <a:avLst/>
@@ -10953,8 +12622,8 @@
         </p:nvSpPr>
         <p:spPr>
           <a:xfrm>
-            <a:off x="502920" y="1115568"/>
-            <a:ext cx="8138160" cy="27432"/>
+            <a:off x="670560" y="1115568"/>
+            <a:ext cx="10850880" cy="27432"/>
           </a:xfrm>
           <a:prstGeom prst="rect">
             <a:avLst/>
@@ -10997,8 +12666,8 @@
         </p:nvSpPr>
         <p:spPr>
           <a:xfrm>
-            <a:off x="502920" y="6355080"/>
-            <a:ext cx="1463040" cy="228600"/>
+            <a:off x="670560" y="6355080"/>
+            <a:ext cx="1950720" cy="228600"/>
           </a:xfrm>
           <a:prstGeom prst="rect">
             <a:avLst/>
@@ -11026,7 +12695,7 @@
                 </a:solidFill>
                 <a:latin typeface="Inter"/>
               </a:rPr>
-              <a:t>05/10/2026</a:t>
+              <a:t>2026</a:t>
             </a:r>
           </a:p>
         </p:txBody>
@@ -11039,8 +12708,8 @@
         </p:nvSpPr>
         <p:spPr>
           <a:xfrm>
-            <a:off x="3840480" y="6355080"/>
-            <a:ext cx="3291840" cy="228600"/>
+            <a:off x="5120640" y="6355080"/>
+            <a:ext cx="4389120" cy="228600"/>
           </a:xfrm>
           <a:prstGeom prst="rect">
             <a:avLst/>
@@ -11081,8 +12750,8 @@
         </p:nvSpPr>
         <p:spPr>
           <a:xfrm>
-            <a:off x="6858000" y="6355080"/>
-            <a:ext cx="1783080" cy="228600"/>
+            <a:off x="9144000" y="6355080"/>
+            <a:ext cx="2377440" cy="228600"/>
           </a:xfrm>
           <a:prstGeom prst="rect">
             <a:avLst/>
@@ -11124,8 +12793,8 @@
           <p:nvPr/>
         </p:nvGraphicFramePr>
         <p:xfrm>
-          <a:off x="502920" y="1371600"/>
-          <a:ext cx="8138160" cy="3200400"/>
+          <a:off x="670560" y="1371600"/>
+          <a:ext cx="10850880" cy="3200400"/>
         </p:xfrm>
         <a:graphic>
           <a:graphicData uri="http://schemas.openxmlformats.org/drawingml/2006/table">
@@ -11134,8 +12803,8 @@
                 <a:tableStyleId>{5C22544A-7EE6-4342-B048-85BDC9FD1C3A}</a:tableStyleId>
               </a:tblPr>
               <a:tblGrid>
-                <a:gridCol w="2926080"/>
-                <a:gridCol w="5212080"/>
+                <a:gridCol w="3901440"/>
+                <a:gridCol w="6949440"/>
               </a:tblGrid>
               <a:tr h="640080">
                 <a:tc>
@@ -11479,8 +13148,8 @@
         </p:nvSpPr>
         <p:spPr>
           <a:xfrm>
-            <a:off x="502920" y="4800600"/>
-            <a:ext cx="8138160" cy="777240"/>
+            <a:off x="670560" y="4800600"/>
+            <a:ext cx="10850880" cy="777240"/>
           </a:xfrm>
           <a:prstGeom prst="rect">
             <a:avLst/>
@@ -11523,8 +13192,8 @@
         </p:nvSpPr>
         <p:spPr>
           <a:xfrm>
-            <a:off x="667512" y="4919472"/>
-            <a:ext cx="7808976" cy="594359"/>
+            <a:off x="890016" y="4919472"/>
+            <a:ext cx="10411968" cy="594359"/>
           </a:xfrm>
           <a:prstGeom prst="rect">
             <a:avLst/>
@@ -11599,7 +13268,7 @@
         </p:blipFill>
         <p:spPr>
           <a:xfrm>
-            <a:off x="36576" y="27432"/>
+            <a:off x="48768" y="27432"/>
             <a:ext cx="1709928" cy="941832"/>
           </a:xfrm>
           <a:prstGeom prst="rect">
@@ -11615,8 +13284,8 @@
         </p:nvSpPr>
         <p:spPr>
           <a:xfrm>
-            <a:off x="1746504" y="512064"/>
-            <a:ext cx="6894576" cy="457200"/>
+            <a:off x="2328672" y="512064"/>
+            <a:ext cx="9192768" cy="457200"/>
           </a:xfrm>
           <a:prstGeom prst="rect">
             <a:avLst/>
@@ -11657,8 +13326,8 @@
         </p:nvSpPr>
         <p:spPr>
           <a:xfrm>
-            <a:off x="502920" y="1115568"/>
-            <a:ext cx="8138160" cy="27432"/>
+            <a:off x="670560" y="1115568"/>
+            <a:ext cx="10850880" cy="27432"/>
           </a:xfrm>
           <a:prstGeom prst="rect">
             <a:avLst/>
@@ -11701,8 +13370,8 @@
         </p:nvSpPr>
         <p:spPr>
           <a:xfrm>
-            <a:off x="502920" y="6355080"/>
-            <a:ext cx="1463040" cy="228600"/>
+            <a:off x="670560" y="6355080"/>
+            <a:ext cx="1950720" cy="228600"/>
           </a:xfrm>
           <a:prstGeom prst="rect">
             <a:avLst/>
@@ -11730,7 +13399,7 @@
                 </a:solidFill>
                 <a:latin typeface="Inter"/>
               </a:rPr>
-              <a:t>05/10/2026</a:t>
+              <a:t>2026</a:t>
             </a:r>
           </a:p>
         </p:txBody>
@@ -11743,8 +13412,8 @@
         </p:nvSpPr>
         <p:spPr>
           <a:xfrm>
-            <a:off x="3840480" y="6355080"/>
-            <a:ext cx="3291840" cy="228600"/>
+            <a:off x="5120640" y="6355080"/>
+            <a:ext cx="4389120" cy="228600"/>
           </a:xfrm>
           <a:prstGeom prst="rect">
             <a:avLst/>
@@ -11785,8 +13454,8 @@
         </p:nvSpPr>
         <p:spPr>
           <a:xfrm>
-            <a:off x="6858000" y="6355080"/>
-            <a:ext cx="1783080" cy="228600"/>
+            <a:off x="9144000" y="6355080"/>
+            <a:ext cx="2377440" cy="228600"/>
           </a:xfrm>
           <a:prstGeom prst="rect">
             <a:avLst/>
@@ -11828,8 +13497,8 @@
           <p:nvPr/>
         </p:nvGraphicFramePr>
         <p:xfrm>
-          <a:off x="502920" y="1371600"/>
-          <a:ext cx="8138160" cy="3291840"/>
+          <a:off x="670560" y="1371600"/>
+          <a:ext cx="10850880" cy="3291840"/>
         </p:xfrm>
         <a:graphic>
           <a:graphicData uri="http://schemas.openxmlformats.org/drawingml/2006/table">
@@ -11838,9 +13507,9 @@
                 <a:tableStyleId>{5C22544A-7EE6-4342-B048-85BDC9FD1C3A}</a:tableStyleId>
               </a:tblPr>
               <a:tblGrid>
-                <a:gridCol w="2103120"/>
-                <a:gridCol w="2926080"/>
-                <a:gridCol w="3108960"/>
+                <a:gridCol w="2804160"/>
+                <a:gridCol w="3901440"/>
+                <a:gridCol w="4145280"/>
               </a:tblGrid>
               <a:tr h="822960">
                 <a:tc>
@@ -12246,8 +13915,8 @@
         </p:nvSpPr>
         <p:spPr>
           <a:xfrm>
-            <a:off x="502920" y="4892040"/>
-            <a:ext cx="8138160" cy="1097280"/>
+            <a:off x="670560" y="4892040"/>
+            <a:ext cx="10850880" cy="1097280"/>
           </a:xfrm>
           <a:prstGeom prst="rect">
             <a:avLst/>
@@ -12341,7 +14010,7 @@
         </p:blipFill>
         <p:spPr>
           <a:xfrm>
-            <a:off x="36576" y="27432"/>
+            <a:off x="48768" y="27432"/>
             <a:ext cx="1709928" cy="941832"/>
           </a:xfrm>
           <a:prstGeom prst="rect">
@@ -12357,8 +14026,8 @@
         </p:nvSpPr>
         <p:spPr>
           <a:xfrm>
-            <a:off x="1746504" y="512064"/>
-            <a:ext cx="6894576" cy="457200"/>
+            <a:off x="2328672" y="512064"/>
+            <a:ext cx="9192768" cy="457200"/>
           </a:xfrm>
           <a:prstGeom prst="rect">
             <a:avLst/>
@@ -12399,8 +14068,8 @@
         </p:nvSpPr>
         <p:spPr>
           <a:xfrm>
-            <a:off x="502920" y="1115568"/>
-            <a:ext cx="8138160" cy="27432"/>
+            <a:off x="670560" y="1115568"/>
+            <a:ext cx="10850880" cy="27432"/>
           </a:xfrm>
           <a:prstGeom prst="rect">
             <a:avLst/>
@@ -12443,8 +14112,8 @@
         </p:nvSpPr>
         <p:spPr>
           <a:xfrm>
-            <a:off x="502920" y="6355080"/>
-            <a:ext cx="1463040" cy="228600"/>
+            <a:off x="670560" y="6355080"/>
+            <a:ext cx="1950720" cy="228600"/>
           </a:xfrm>
           <a:prstGeom prst="rect">
             <a:avLst/>
@@ -12472,7 +14141,7 @@
                 </a:solidFill>
                 <a:latin typeface="Inter"/>
               </a:rPr>
-              <a:t>05/10/2026</a:t>
+              <a:t>2026</a:t>
             </a:r>
           </a:p>
         </p:txBody>
@@ -12485,8 +14154,8 @@
         </p:nvSpPr>
         <p:spPr>
           <a:xfrm>
-            <a:off x="3840480" y="6355080"/>
-            <a:ext cx="3291840" cy="228600"/>
+            <a:off x="5120640" y="6355080"/>
+            <a:ext cx="4389120" cy="228600"/>
           </a:xfrm>
           <a:prstGeom prst="rect">
             <a:avLst/>
@@ -12527,8 +14196,8 @@
         </p:nvSpPr>
         <p:spPr>
           <a:xfrm>
-            <a:off x="6858000" y="6355080"/>
-            <a:ext cx="1783080" cy="228600"/>
+            <a:off x="9144000" y="6355080"/>
+            <a:ext cx="2377440" cy="228600"/>
           </a:xfrm>
           <a:prstGeom prst="rect">
             <a:avLst/>
@@ -12569,8 +14238,8 @@
         </p:nvSpPr>
         <p:spPr>
           <a:xfrm>
-            <a:off x="4507992" y="1417320"/>
-            <a:ext cx="12801" cy="3566160"/>
+            <a:off x="6010656" y="1417320"/>
+            <a:ext cx="17068" cy="3566160"/>
           </a:xfrm>
           <a:prstGeom prst="rect">
             <a:avLst/>
@@ -12613,8 +14282,8 @@
         </p:nvSpPr>
         <p:spPr>
           <a:xfrm>
-            <a:off x="502920" y="1417320"/>
-            <a:ext cx="3566160" cy="274320"/>
+            <a:off x="670560" y="1417320"/>
+            <a:ext cx="4754880" cy="274320"/>
           </a:xfrm>
           <a:prstGeom prst="rect">
             <a:avLst/>
@@ -12655,8 +14324,8 @@
         </p:nvSpPr>
         <p:spPr>
           <a:xfrm>
-            <a:off x="502920" y="1783080"/>
-            <a:ext cx="3657600" cy="3657600"/>
+            <a:off x="670560" y="1783080"/>
+            <a:ext cx="4876800" cy="3657600"/>
           </a:xfrm>
           <a:prstGeom prst="rect">
             <a:avLst/>
@@ -12754,8 +14423,8 @@
         </p:nvSpPr>
         <p:spPr>
           <a:xfrm>
-            <a:off x="4892040" y="1417320"/>
-            <a:ext cx="3657600" cy="274320"/>
+            <a:off x="6522720" y="1417320"/>
+            <a:ext cx="4876800" cy="274320"/>
           </a:xfrm>
           <a:prstGeom prst="rect">
             <a:avLst/>
@@ -12796,8 +14465,8 @@
         </p:nvSpPr>
         <p:spPr>
           <a:xfrm>
-            <a:off x="4892040" y="1783080"/>
-            <a:ext cx="3749039" cy="3657600"/>
+            <a:off x="6522720" y="1783080"/>
+            <a:ext cx="4998719" cy="3657600"/>
           </a:xfrm>
           <a:prstGeom prst="rect">
             <a:avLst/>
@@ -12895,8 +14564,8 @@
         </p:nvSpPr>
         <p:spPr>
           <a:xfrm>
-            <a:off x="502920" y="5074920"/>
-            <a:ext cx="8138160" cy="548640"/>
+            <a:off x="670560" y="5074920"/>
+            <a:ext cx="10850880" cy="548640"/>
           </a:xfrm>
           <a:prstGeom prst="rect">
             <a:avLst/>
@@ -12939,8 +14608,8 @@
         </p:nvSpPr>
         <p:spPr>
           <a:xfrm>
-            <a:off x="667512" y="5193792"/>
-            <a:ext cx="7808976" cy="365759"/>
+            <a:off x="890016" y="5193792"/>
+            <a:ext cx="10411968" cy="365759"/>
           </a:xfrm>
           <a:prstGeom prst="rect">
             <a:avLst/>
@@ -13015,7 +14684,7 @@
         </p:blipFill>
         <p:spPr>
           <a:xfrm>
-            <a:off x="36576" y="27432"/>
+            <a:off x="48768" y="27432"/>
             <a:ext cx="1709928" cy="941832"/>
           </a:xfrm>
           <a:prstGeom prst="rect">
@@ -13031,8 +14700,8 @@
         </p:nvSpPr>
         <p:spPr>
           <a:xfrm>
-            <a:off x="1746504" y="512064"/>
-            <a:ext cx="6894576" cy="457200"/>
+            <a:off x="2328672" y="512064"/>
+            <a:ext cx="9192768" cy="457200"/>
           </a:xfrm>
           <a:prstGeom prst="rect">
             <a:avLst/>
@@ -13073,8 +14742,8 @@
         </p:nvSpPr>
         <p:spPr>
           <a:xfrm>
-            <a:off x="502920" y="1115568"/>
-            <a:ext cx="8138160" cy="27432"/>
+            <a:off x="670560" y="1115568"/>
+            <a:ext cx="10850880" cy="27432"/>
           </a:xfrm>
           <a:prstGeom prst="rect">
             <a:avLst/>
@@ -13117,8 +14786,8 @@
         </p:nvSpPr>
         <p:spPr>
           <a:xfrm>
-            <a:off x="502920" y="6355080"/>
-            <a:ext cx="1463040" cy="228600"/>
+            <a:off x="670560" y="6355080"/>
+            <a:ext cx="1950720" cy="228600"/>
           </a:xfrm>
           <a:prstGeom prst="rect">
             <a:avLst/>
@@ -13146,7 +14815,7 @@
                 </a:solidFill>
                 <a:latin typeface="Inter"/>
               </a:rPr>
-              <a:t>05/10/2026</a:t>
+              <a:t>2026</a:t>
             </a:r>
           </a:p>
         </p:txBody>
@@ -13159,8 +14828,8 @@
         </p:nvSpPr>
         <p:spPr>
           <a:xfrm>
-            <a:off x="3840480" y="6355080"/>
-            <a:ext cx="3291840" cy="228600"/>
+            <a:off x="5120640" y="6355080"/>
+            <a:ext cx="4389120" cy="228600"/>
           </a:xfrm>
           <a:prstGeom prst="rect">
             <a:avLst/>
@@ -13201,8 +14870,8 @@
         </p:nvSpPr>
         <p:spPr>
           <a:xfrm>
-            <a:off x="6858000" y="6355080"/>
-            <a:ext cx="1783080" cy="228600"/>
+            <a:off x="9144000" y="6355080"/>
+            <a:ext cx="2377440" cy="228600"/>
           </a:xfrm>
           <a:prstGeom prst="rect">
             <a:avLst/>
@@ -13243,8 +14912,8 @@
         </p:nvSpPr>
         <p:spPr>
           <a:xfrm>
-            <a:off x="502920" y="1371600"/>
-            <a:ext cx="8138160" cy="1783080"/>
+            <a:off x="670560" y="1371600"/>
+            <a:ext cx="10850880" cy="1783080"/>
           </a:xfrm>
           <a:prstGeom prst="rect">
             <a:avLst/>
@@ -13287,8 +14956,8 @@
         </p:nvSpPr>
         <p:spPr>
           <a:xfrm>
-            <a:off x="649224" y="1490472"/>
-            <a:ext cx="7845552" cy="1581912"/>
+            <a:off x="865632" y="1490472"/>
+            <a:ext cx="10460736" cy="1581912"/>
           </a:xfrm>
           <a:prstGeom prst="rect">
             <a:avLst/>
@@ -13462,8 +15131,8 @@
         </p:nvSpPr>
         <p:spPr>
           <a:xfrm>
-            <a:off x="502920" y="3657600"/>
-            <a:ext cx="8138160" cy="2011680"/>
+            <a:off x="670560" y="3657600"/>
+            <a:ext cx="10850880" cy="2011680"/>
           </a:xfrm>
           <a:prstGeom prst="rect">
             <a:avLst/>
@@ -13561,8 +15230,8 @@
         </p:nvSpPr>
         <p:spPr>
           <a:xfrm>
-            <a:off x="502920" y="5074920"/>
-            <a:ext cx="8138160" cy="502920"/>
+            <a:off x="670560" y="5074920"/>
+            <a:ext cx="10850880" cy="502920"/>
           </a:xfrm>
           <a:prstGeom prst="rect">
             <a:avLst/>
@@ -13605,8 +15274,8 @@
         </p:nvSpPr>
         <p:spPr>
           <a:xfrm>
-            <a:off x="667512" y="5193792"/>
-            <a:ext cx="7808976" cy="320040"/>
+            <a:off x="890016" y="5193792"/>
+            <a:ext cx="10411968" cy="320040"/>
           </a:xfrm>
           <a:prstGeom prst="rect">
             <a:avLst/>
@@ -13681,7 +15350,7 @@
         </p:blipFill>
         <p:spPr>
           <a:xfrm>
-            <a:off x="36576" y="27432"/>
+            <a:off x="48768" y="27432"/>
             <a:ext cx="1709928" cy="941832"/>
           </a:xfrm>
           <a:prstGeom prst="rect">
@@ -13697,8 +15366,8 @@
         </p:nvSpPr>
         <p:spPr>
           <a:xfrm>
-            <a:off x="1746504" y="512064"/>
-            <a:ext cx="6894576" cy="457200"/>
+            <a:off x="2328672" y="512064"/>
+            <a:ext cx="9192768" cy="457200"/>
           </a:xfrm>
           <a:prstGeom prst="rect">
             <a:avLst/>
@@ -13739,8 +15408,8 @@
         </p:nvSpPr>
         <p:spPr>
           <a:xfrm>
-            <a:off x="502920" y="1115568"/>
-            <a:ext cx="8138160" cy="27432"/>
+            <a:off x="670560" y="1115568"/>
+            <a:ext cx="10850880" cy="27432"/>
           </a:xfrm>
           <a:prstGeom prst="rect">
             <a:avLst/>
@@ -13783,8 +15452,8 @@
         </p:nvSpPr>
         <p:spPr>
           <a:xfrm>
-            <a:off x="502920" y="6355080"/>
-            <a:ext cx="1463040" cy="228600"/>
+            <a:off x="670560" y="6355080"/>
+            <a:ext cx="1950720" cy="228600"/>
           </a:xfrm>
           <a:prstGeom prst="rect">
             <a:avLst/>
@@ -13812,7 +15481,7 @@
                 </a:solidFill>
                 <a:latin typeface="Inter"/>
               </a:rPr>
-              <a:t>05/10/2026</a:t>
+              <a:t>2026</a:t>
             </a:r>
           </a:p>
         </p:txBody>
@@ -13825,8 +15494,8 @@
         </p:nvSpPr>
         <p:spPr>
           <a:xfrm>
-            <a:off x="3840480" y="6355080"/>
-            <a:ext cx="3291840" cy="228600"/>
+            <a:off x="5120640" y="6355080"/>
+            <a:ext cx="4389120" cy="228600"/>
           </a:xfrm>
           <a:prstGeom prst="rect">
             <a:avLst/>
@@ -13867,8 +15536,8 @@
         </p:nvSpPr>
         <p:spPr>
           <a:xfrm>
-            <a:off x="6858000" y="6355080"/>
-            <a:ext cx="1783080" cy="228600"/>
+            <a:off x="9144000" y="6355080"/>
+            <a:ext cx="2377440" cy="228600"/>
           </a:xfrm>
           <a:prstGeom prst="rect">
             <a:avLst/>
@@ -13909,8 +15578,8 @@
         </p:nvSpPr>
         <p:spPr>
           <a:xfrm>
-            <a:off x="502920" y="1325880"/>
-            <a:ext cx="3840480" cy="274320"/>
+            <a:off x="670560" y="1325880"/>
+            <a:ext cx="5120640" cy="274320"/>
           </a:xfrm>
           <a:prstGeom prst="rect">
             <a:avLst/>
@@ -13951,8 +15620,8 @@
         </p:nvSpPr>
         <p:spPr>
           <a:xfrm>
-            <a:off x="502920" y="1664208"/>
-            <a:ext cx="3840480" cy="2286000"/>
+            <a:off x="670560" y="1664208"/>
+            <a:ext cx="5120640" cy="2286000"/>
           </a:xfrm>
           <a:prstGeom prst="rect">
             <a:avLst/>
@@ -13995,8 +15664,8 @@
         </p:nvSpPr>
         <p:spPr>
           <a:xfrm>
-            <a:off x="649224" y="1783080"/>
-            <a:ext cx="3547872" cy="2084831"/>
+            <a:off x="865632" y="1783080"/>
+            <a:ext cx="4730496" cy="2084831"/>
           </a:xfrm>
           <a:prstGeom prst="rect">
             <a:avLst/>
@@ -14062,7 +15731,7 @@
                 </a:solidFill>
                 <a:latin typeface="JetBrains Mono"/>
               </a:rPr>
-              <a:t>2. Validate payload + quyền</a:t>
+              <a:t>2. Validate loại QR + dữ liệu</a:t>
             </a:r>
           </a:p>
           <a:p>
@@ -14081,7 +15750,7 @@
                 </a:solidFill>
                 <a:latin typeface="JetBrains Mono"/>
               </a:rPr>
-              <a:t>3. Sinh token &gt;= 128 bit</a:t>
+              <a:t>3. Sinh token ngẫu nhiên 24 byte (~192 bit)</a:t>
             </a:r>
           </a:p>
           <a:p>
@@ -14151,8 +15820,8 @@
         </p:nvSpPr>
         <p:spPr>
           <a:xfrm>
-            <a:off x="4800600" y="1325880"/>
-            <a:ext cx="3840480" cy="274320"/>
+            <a:off x="6400800" y="1325880"/>
+            <a:ext cx="5120640" cy="274320"/>
           </a:xfrm>
           <a:prstGeom prst="rect">
             <a:avLst/>
@@ -14193,8 +15862,8 @@
         </p:nvSpPr>
         <p:spPr>
           <a:xfrm>
-            <a:off x="4800600" y="1664208"/>
-            <a:ext cx="3840480" cy="2286000"/>
+            <a:off x="6400800" y="1664208"/>
+            <a:ext cx="5120640" cy="2286000"/>
           </a:xfrm>
           <a:prstGeom prst="rect">
             <a:avLst/>
@@ -14237,8 +15906,8 @@
         </p:nvSpPr>
         <p:spPr>
           <a:xfrm>
-            <a:off x="4946904" y="1783080"/>
-            <a:ext cx="3547872" cy="2084831"/>
+            <a:off x="6595872" y="1783080"/>
+            <a:ext cx="4730496" cy="2084831"/>
           </a:xfrm>
           <a:prstGeom prst="rect">
             <a:avLst/>
@@ -14374,8 +16043,8 @@
         </p:nvSpPr>
         <p:spPr>
           <a:xfrm>
-            <a:off x="502920" y="4251960"/>
-            <a:ext cx="8138160" cy="548640"/>
+            <a:off x="670560" y="4251960"/>
+            <a:ext cx="10850880" cy="548640"/>
           </a:xfrm>
           <a:prstGeom prst="rect">
             <a:avLst/>
@@ -14418,8 +16087,8 @@
         </p:nvSpPr>
         <p:spPr>
           <a:xfrm>
-            <a:off x="667512" y="4370832"/>
-            <a:ext cx="7808976" cy="365759"/>
+            <a:off x="890016" y="4370832"/>
+            <a:ext cx="10411968" cy="365759"/>
           </a:xfrm>
           <a:prstGeom prst="rect">
             <a:avLst/>
@@ -14460,8 +16129,8 @@
         </p:nvSpPr>
         <p:spPr>
           <a:xfrm>
-            <a:off x="502920" y="5074920"/>
-            <a:ext cx="8138160" cy="548640"/>
+            <a:off x="670560" y="5074920"/>
+            <a:ext cx="10850880" cy="548640"/>
           </a:xfrm>
           <a:prstGeom prst="rect">
             <a:avLst/>
@@ -14504,8 +16173,8 @@
         </p:nvSpPr>
         <p:spPr>
           <a:xfrm>
-            <a:off x="667512" y="5193792"/>
-            <a:ext cx="7808976" cy="365759"/>
+            <a:off x="890016" y="5193792"/>
+            <a:ext cx="10411968" cy="365759"/>
           </a:xfrm>
           <a:prstGeom prst="rect">
             <a:avLst/>
@@ -14580,7 +16249,7 @@
         </p:blipFill>
         <p:spPr>
           <a:xfrm>
-            <a:off x="36576" y="27432"/>
+            <a:off x="48768" y="27432"/>
             <a:ext cx="1709928" cy="941832"/>
           </a:xfrm>
           <a:prstGeom prst="rect">
@@ -14596,8 +16265,8 @@
         </p:nvSpPr>
         <p:spPr>
           <a:xfrm>
-            <a:off x="1746504" y="512064"/>
-            <a:ext cx="6894576" cy="457200"/>
+            <a:off x="2328672" y="512064"/>
+            <a:ext cx="9192768" cy="457200"/>
           </a:xfrm>
           <a:prstGeom prst="rect">
             <a:avLst/>
@@ -14638,8 +16307,8 @@
         </p:nvSpPr>
         <p:spPr>
           <a:xfrm>
-            <a:off x="502920" y="1115568"/>
-            <a:ext cx="8138160" cy="27432"/>
+            <a:off x="670560" y="1115568"/>
+            <a:ext cx="10850880" cy="27432"/>
           </a:xfrm>
           <a:prstGeom prst="rect">
             <a:avLst/>
@@ -14682,8 +16351,8 @@
         </p:nvSpPr>
         <p:spPr>
           <a:xfrm>
-            <a:off x="502920" y="6355080"/>
-            <a:ext cx="1463040" cy="228600"/>
+            <a:off x="670560" y="6355080"/>
+            <a:ext cx="1950720" cy="228600"/>
           </a:xfrm>
           <a:prstGeom prst="rect">
             <a:avLst/>
@@ -14711,7 +16380,7 @@
                 </a:solidFill>
                 <a:latin typeface="Inter"/>
               </a:rPr>
-              <a:t>05/10/2026</a:t>
+              <a:t>2026</a:t>
             </a:r>
           </a:p>
         </p:txBody>
@@ -14724,8 +16393,8 @@
         </p:nvSpPr>
         <p:spPr>
           <a:xfrm>
-            <a:off x="3840480" y="6355080"/>
-            <a:ext cx="3291840" cy="228600"/>
+            <a:off x="5120640" y="6355080"/>
+            <a:ext cx="4389120" cy="228600"/>
           </a:xfrm>
           <a:prstGeom prst="rect">
             <a:avLst/>
@@ -14766,8 +16435,8 @@
         </p:nvSpPr>
         <p:spPr>
           <a:xfrm>
-            <a:off x="6858000" y="6355080"/>
-            <a:ext cx="1783080" cy="228600"/>
+            <a:off x="9144000" y="6355080"/>
+            <a:ext cx="2377440" cy="228600"/>
           </a:xfrm>
           <a:prstGeom prst="rect">
             <a:avLst/>
@@ -14809,8 +16478,8 @@
           <p:nvPr/>
         </p:nvGraphicFramePr>
         <p:xfrm>
-          <a:off x="502920" y="1325880"/>
-          <a:ext cx="8138160" cy="2304288"/>
+          <a:off x="670560" y="1325880"/>
+          <a:ext cx="10850880" cy="2304288"/>
         </p:xfrm>
         <a:graphic>
           <a:graphicData uri="http://schemas.openxmlformats.org/drawingml/2006/table">
@@ -14819,9 +16488,9 @@
                 <a:tableStyleId>{5C22544A-7EE6-4342-B048-85BDC9FD1C3A}</a:tableStyleId>
               </a:tblPr>
               <a:tblGrid>
-                <a:gridCol w="777240"/>
-                <a:gridCol w="2971800"/>
-                <a:gridCol w="4389120"/>
+                <a:gridCol w="1036320"/>
+                <a:gridCol w="3962400"/>
+                <a:gridCol w="5852160"/>
               </a:tblGrid>
               <a:tr h="329184">
                 <a:tc>
@@ -15429,7 +17098,7 @@
                           </a:solidFill>
                           <a:latin typeface="Inter"/>
                         </a:rPr>
-                        <a:t>GET</a:t>
+                        <a:t>GET / POST</a:t>
                       </a:r>
                     </a:p>
                   </a:txBody>
@@ -15461,7 +17130,7 @@
                           </a:solidFill>
                           <a:latin typeface="Inter"/>
                         </a:rPr>
-                        <a:t>/api/stats</a:t>
+                        <a:t>/api/stats · /api/reset</a:t>
                       </a:r>
                     </a:p>
                   </a:txBody>
@@ -15493,7 +17162,7 @@
                           </a:solidFill>
                           <a:latin typeface="Inter"/>
                         </a:rPr>
-                        <a:t>Đếm và danh sách check-in gần nhất</a:t>
+                        <a:t>Thống kê và reset lịch sử check-in</a:t>
                       </a:r>
                     </a:p>
                   </a:txBody>
@@ -15529,7 +17198,7 @@
         </p:blipFill>
         <p:spPr>
           <a:xfrm>
-            <a:off x="502920" y="4160520"/>
+            <a:off x="670560" y="4160520"/>
             <a:ext cx="2560320" cy="1978429"/>
           </a:xfrm>
           <a:prstGeom prst="rect">
@@ -15545,8 +17214,8 @@
         </p:nvSpPr>
         <p:spPr>
           <a:xfrm>
-            <a:off x="3429000" y="4709160"/>
-            <a:ext cx="4937760" cy="914400"/>
+            <a:off x="4572000" y="4709160"/>
+            <a:ext cx="6583680" cy="914400"/>
           </a:xfrm>
           <a:prstGeom prst="rect">
             <a:avLst/>
